--- a/output_pptx/In_Christ_Alone.pptx
+++ b/output_pptx/In_Christ_Alone.pptx
@@ -3130,23 +3130,23 @@
         </p:nvSpPr>
         <p:spPr>
           <a:xfrm>
-            <a:off x="594360" y="2258568"/>
-            <a:ext cx="11002975" cy="685800"/>
-          </a:xfrm>
-          <a:prstGeom prst="rect">
-            <a:avLst/>
-          </a:prstGeom>
-          <a:noFill/>
-        </p:spPr>
-        <p:txBody>
-          <a:bodyPr wrap="square">
-            <a:spAutoFit/>
-          </a:bodyPr>
-          <a:lstStyle/>
-          <a:p>
-            <a:pPr algn="ctr"/>
-            <a:r>
-              <a:rPr sz="4400" b="1" i="0">
+            <a:off x="640080" y="2052828"/>
+            <a:ext cx="10911535" cy="731520"/>
+          </a:xfrm>
+          <a:prstGeom prst="rect">
+            <a:avLst/>
+          </a:prstGeom>
+          <a:noFill/>
+        </p:spPr>
+        <p:txBody>
+          <a:bodyPr wrap="square">
+            <a:spAutoFit/>
+          </a:bodyPr>
+          <a:lstStyle/>
+          <a:p>
+            <a:pPr algn="ctr"/>
+            <a:r>
+              <a:rPr sz="4800" b="1" i="0">
                 <a:solidFill>
                   <a:srgbClr val="FFFFFF"/>
                 </a:solidFill>
@@ -3165,25 +3165,60 @@
         </p:nvSpPr>
         <p:spPr>
           <a:xfrm>
-            <a:off x="594360" y="2980944"/>
-            <a:ext cx="11002975" cy="347472"/>
-          </a:xfrm>
-          <a:prstGeom prst="rect">
-            <a:avLst/>
-          </a:prstGeom>
-          <a:noFill/>
-        </p:spPr>
-        <p:txBody>
-          <a:bodyPr wrap="square">
-            <a:spAutoFit/>
-          </a:bodyPr>
-          <a:lstStyle/>
-          <a:p>
-            <a:pPr algn="ctr"/>
-            <a:r>
-              <a:rPr sz="2200" b="0" i="1">
-                <a:solidFill>
-                  <a:srgbClr val="8C8C8C"/>
+            <a:off x="640080" y="2985516"/>
+            <a:ext cx="10911535" cy="731520"/>
+          </a:xfrm>
+          <a:prstGeom prst="rect">
+            <a:avLst/>
+          </a:prstGeom>
+          <a:noFill/>
+        </p:spPr>
+        <p:txBody>
+          <a:bodyPr wrap="square">
+            <a:spAutoFit/>
+          </a:bodyPr>
+          <a:lstStyle/>
+          <a:p>
+            <a:pPr algn="ctr"/>
+            <a:r>
+              <a:rPr sz="4000" b="1" i="0">
+                <a:solidFill>
+                  <a:srgbClr val="FFFFFF"/>
+                </a:solidFill>
+                <a:latin typeface="Arial"/>
+              </a:rPr>
+              <a:t>Somente em Cristo minha esperança está</a:t>
+            </a:r>
+          </a:p>
+        </p:txBody>
+      </p:sp>
+      <p:sp>
+        <p:nvSpPr>
+          <p:cNvPr id="4" name="TextBox 3"/>
+          <p:cNvSpPr txBox="1"/>
+          <p:nvPr/>
+        </p:nvSpPr>
+        <p:spPr>
+          <a:xfrm>
+            <a:off x="640080" y="4128516"/>
+            <a:ext cx="10911535" cy="310896"/>
+          </a:xfrm>
+          <a:prstGeom prst="rect">
+            <a:avLst/>
+          </a:prstGeom>
+          <a:noFill/>
+        </p:spPr>
+        <p:txBody>
+          <a:bodyPr wrap="square">
+            <a:spAutoFit/>
+          </a:bodyPr>
+          <a:lstStyle/>
+          <a:p>
+            <a:pPr algn="ctr"/>
+            <a:r>
+              <a:rPr sz="2000" b="0" i="0">
+                <a:solidFill>
+                  <a:srgbClr val="828282"/>
                 </a:solidFill>
                 <a:latin typeface="Arial"/>
               </a:rPr>
@@ -3194,66 +3229,31 @@
       </p:sp>
       <p:sp>
         <p:nvSpPr>
-          <p:cNvPr id="4" name="TextBox 3"/>
-          <p:cNvSpPr txBox="1"/>
-          <p:nvPr/>
-        </p:nvSpPr>
-        <p:spPr>
-          <a:xfrm>
-            <a:off x="594360" y="3529584"/>
-            <a:ext cx="11002975" cy="685800"/>
-          </a:xfrm>
-          <a:prstGeom prst="rect">
-            <a:avLst/>
-          </a:prstGeom>
-          <a:noFill/>
-        </p:spPr>
-        <p:txBody>
-          <a:bodyPr wrap="square">
-            <a:spAutoFit/>
-          </a:bodyPr>
-          <a:lstStyle/>
-          <a:p>
-            <a:pPr algn="ctr"/>
-            <a:r>
-              <a:rPr sz="3705" b="1" i="0">
-                <a:solidFill>
-                  <a:srgbClr val="FFFFFF"/>
-                </a:solidFill>
-                <a:latin typeface="Arial"/>
-              </a:rPr>
-              <a:t>Somente em Cristo minha esperança está</a:t>
-            </a:r>
-          </a:p>
-        </p:txBody>
-      </p:sp>
-      <p:sp>
-        <p:nvSpPr>
           <p:cNvPr id="5" name="TextBox 4"/>
           <p:cNvSpPr txBox="1"/>
           <p:nvPr/>
         </p:nvSpPr>
         <p:spPr>
           <a:xfrm>
-            <a:off x="594360" y="4251960"/>
-            <a:ext cx="11002975" cy="347472"/>
-          </a:xfrm>
-          <a:prstGeom prst="rect">
-            <a:avLst/>
-          </a:prstGeom>
-          <a:noFill/>
-        </p:spPr>
-        <p:txBody>
-          <a:bodyPr wrap="square">
-            <a:spAutoFit/>
-          </a:bodyPr>
-          <a:lstStyle/>
-          <a:p>
-            <a:pPr algn="ctr"/>
-            <a:r>
-              <a:rPr sz="2200" b="0" i="1">
-                <a:solidFill>
-                  <a:srgbClr val="8C8C8C"/>
+            <a:off x="640080" y="4494276"/>
+            <a:ext cx="10911535" cy="310896"/>
+          </a:xfrm>
+          <a:prstGeom prst="rect">
+            <a:avLst/>
+          </a:prstGeom>
+          <a:noFill/>
+        </p:spPr>
+        <p:txBody>
+          <a:bodyPr wrap="square">
+            <a:spAutoFit/>
+          </a:bodyPr>
+          <a:lstStyle/>
+          <a:p>
+            <a:pPr algn="ctr"/>
+            <a:r>
+              <a:rPr sz="2000" b="0" i="0">
+                <a:solidFill>
+                  <a:srgbClr val="828282"/>
                 </a:solidFill>
                 <a:latin typeface="Arial"/>
               </a:rPr>
@@ -3296,23 +3296,23 @@
         </p:nvSpPr>
         <p:spPr>
           <a:xfrm>
-            <a:off x="594360" y="2258568"/>
-            <a:ext cx="11002975" cy="685800"/>
-          </a:xfrm>
-          <a:prstGeom prst="rect">
-            <a:avLst/>
-          </a:prstGeom>
-          <a:noFill/>
-        </p:spPr>
-        <p:txBody>
-          <a:bodyPr wrap="square">
-            <a:spAutoFit/>
-          </a:bodyPr>
-          <a:lstStyle/>
-          <a:p>
-            <a:pPr algn="ctr"/>
-            <a:r>
-              <a:rPr sz="4400" b="1" i="0">
+            <a:off x="640080" y="2052828"/>
+            <a:ext cx="10911535" cy="731520"/>
+          </a:xfrm>
+          <a:prstGeom prst="rect">
+            <a:avLst/>
+          </a:prstGeom>
+          <a:noFill/>
+        </p:spPr>
+        <p:txBody>
+          <a:bodyPr wrap="square">
+            <a:spAutoFit/>
+          </a:bodyPr>
+          <a:lstStyle/>
+          <a:p>
+            <a:pPr algn="ctr"/>
+            <a:r>
+              <a:rPr sz="4800" b="1" i="0">
                 <a:solidFill>
                   <a:srgbClr val="FFFFFF"/>
                 </a:solidFill>
@@ -3331,99 +3331,29 @@
         </p:nvSpPr>
         <p:spPr>
           <a:xfrm>
-            <a:off x="594360" y="2980944"/>
-            <a:ext cx="11002975" cy="347472"/>
-          </a:xfrm>
-          <a:prstGeom prst="rect">
-            <a:avLst/>
-          </a:prstGeom>
-          <a:noFill/>
-        </p:spPr>
-        <p:txBody>
-          <a:bodyPr wrap="square">
-            <a:spAutoFit/>
-          </a:bodyPr>
-          <a:lstStyle/>
-          <a:p>
-            <a:pPr algn="ctr"/>
-            <a:r>
-              <a:rPr sz="2200" b="0" i="1">
-                <a:solidFill>
-                  <a:srgbClr val="8C8C8C"/>
-                </a:solidFill>
-                <a:latin typeface="Arial"/>
-              </a:rPr>
-              <a:t/>
-            </a:r>
-          </a:p>
-        </p:txBody>
-      </p:sp>
-      <p:sp>
-        <p:nvSpPr>
-          <p:cNvPr id="4" name="TextBox 3"/>
-          <p:cNvSpPr txBox="1"/>
-          <p:nvPr/>
-        </p:nvSpPr>
-        <p:spPr>
-          <a:xfrm>
-            <a:off x="594360" y="3529584"/>
-            <a:ext cx="11002975" cy="685800"/>
-          </a:xfrm>
-          <a:prstGeom prst="rect">
-            <a:avLst/>
-          </a:prstGeom>
-          <a:noFill/>
-        </p:spPr>
-        <p:txBody>
-          <a:bodyPr wrap="square">
-            <a:spAutoFit/>
-          </a:bodyPr>
-          <a:lstStyle/>
-          <a:p>
-            <a:pPr algn="ctr"/>
-            <a:r>
-              <a:rPr sz="3805" b="1" i="0">
+            <a:off x="640080" y="2985516"/>
+            <a:ext cx="10911535" cy="731520"/>
+          </a:xfrm>
+          <a:prstGeom prst="rect">
+            <a:avLst/>
+          </a:prstGeom>
+          <a:noFill/>
+        </p:spPr>
+        <p:txBody>
+          <a:bodyPr wrap="square">
+            <a:spAutoFit/>
+          </a:bodyPr>
+          <a:lstStyle/>
+          <a:p>
+            <a:pPr algn="ctr"/>
+            <a:r>
+              <a:rPr sz="4100" b="1" i="0">
                 <a:solidFill>
                   <a:srgbClr val="FFFFFF"/>
                 </a:solidFill>
                 <a:latin typeface="Arial"/>
               </a:rPr>
               <a:t>Por cada pecado sobre Ele foi lançado</a:t>
-            </a:r>
-          </a:p>
-        </p:txBody>
-      </p:sp>
-      <p:sp>
-        <p:nvSpPr>
-          <p:cNvPr id="5" name="TextBox 4"/>
-          <p:cNvSpPr txBox="1"/>
-          <p:nvPr/>
-        </p:nvSpPr>
-        <p:spPr>
-          <a:xfrm>
-            <a:off x="594360" y="4251960"/>
-            <a:ext cx="11002975" cy="347472"/>
-          </a:xfrm>
-          <a:prstGeom prst="rect">
-            <a:avLst/>
-          </a:prstGeom>
-          <a:noFill/>
-        </p:spPr>
-        <p:txBody>
-          <a:bodyPr wrap="square">
-            <a:spAutoFit/>
-          </a:bodyPr>
-          <a:lstStyle/>
-          <a:p>
-            <a:pPr algn="ctr"/>
-            <a:r>
-              <a:rPr sz="2200" b="0" i="1">
-                <a:solidFill>
-                  <a:srgbClr val="8C8C8C"/>
-                </a:solidFill>
-                <a:latin typeface="Arial"/>
-              </a:rPr>
-              <a:t/>
             </a:r>
           </a:p>
         </p:txBody>
@@ -3462,23 +3392,23 @@
         </p:nvSpPr>
         <p:spPr>
           <a:xfrm>
-            <a:off x="594360" y="1837944"/>
-            <a:ext cx="11002975" cy="685800"/>
-          </a:xfrm>
-          <a:prstGeom prst="rect">
-            <a:avLst/>
-          </a:prstGeom>
-          <a:noFill/>
-        </p:spPr>
-        <p:txBody>
-          <a:bodyPr wrap="square">
-            <a:spAutoFit/>
-          </a:bodyPr>
-          <a:lstStyle/>
-          <a:p>
-            <a:pPr algn="ctr"/>
-            <a:r>
-              <a:rPr sz="4400" b="1" i="0">
+            <a:off x="640080" y="1650492"/>
+            <a:ext cx="10911535" cy="731520"/>
+          </a:xfrm>
+          <a:prstGeom prst="rect">
+            <a:avLst/>
+          </a:prstGeom>
+          <a:noFill/>
+        </p:spPr>
+        <p:txBody>
+          <a:bodyPr wrap="square">
+            <a:spAutoFit/>
+          </a:bodyPr>
+          <a:lstStyle/>
+          <a:p>
+            <a:pPr algn="ctr"/>
+            <a:r>
+              <a:rPr sz="4800" b="1" i="0">
                 <a:solidFill>
                   <a:srgbClr val="FFFFFF"/>
                 </a:solidFill>
@@ -3497,25 +3427,25 @@
         </p:nvSpPr>
         <p:spPr>
           <a:xfrm>
-            <a:off x="594360" y="2560320"/>
-            <a:ext cx="11002975" cy="384048"/>
-          </a:xfrm>
-          <a:prstGeom prst="rect">
-            <a:avLst/>
-          </a:prstGeom>
-          <a:noFill/>
-        </p:spPr>
-        <p:txBody>
-          <a:bodyPr wrap="square">
-            <a:spAutoFit/>
-          </a:bodyPr>
-          <a:lstStyle/>
-          <a:p>
-            <a:pPr algn="ctr"/>
-            <a:r>
-              <a:rPr sz="2290" b="0" i="1">
-                <a:solidFill>
-                  <a:srgbClr val="B4B4B4"/>
+            <a:off x="640080" y="2418588"/>
+            <a:ext cx="10911535" cy="365760"/>
+          </a:xfrm>
+          <a:prstGeom prst="rect">
+            <a:avLst/>
+          </a:prstGeom>
+          <a:noFill/>
+        </p:spPr>
+        <p:txBody>
+          <a:bodyPr wrap="square">
+            <a:spAutoFit/>
+          </a:bodyPr>
+          <a:lstStyle/>
+          <a:p>
+            <a:pPr algn="ctr"/>
+            <a:r>
+              <a:rPr sz="2400" b="0" i="1">
+                <a:solidFill>
+                  <a:srgbClr val="AAAAAA"/>
                 </a:solidFill>
                 <a:latin typeface="Arial"/>
               </a:rPr>
@@ -3532,8 +3462,78 @@
         </p:nvSpPr>
         <p:spPr>
           <a:xfrm>
-            <a:off x="594360" y="2980944"/>
-            <a:ext cx="11002975" cy="347472"/>
+            <a:off x="640080" y="2985516"/>
+            <a:ext cx="10911535" cy="731520"/>
+          </a:xfrm>
+          <a:prstGeom prst="rect">
+            <a:avLst/>
+          </a:prstGeom>
+          <a:noFill/>
+        </p:spPr>
+        <p:txBody>
+          <a:bodyPr wrap="square">
+            <a:spAutoFit/>
+          </a:bodyPr>
+          <a:lstStyle/>
+          <a:p>
+            <a:pPr algn="ctr"/>
+            <a:r>
+              <a:rPr sz="4800" b="1" i="0">
+                <a:solidFill>
+                  <a:srgbClr val="FFFFFF"/>
+                </a:solidFill>
+                <a:latin typeface="Arial"/>
+              </a:rPr>
+              <a:t>めぐみと  まことに 満ちておられる主</a:t>
+            </a:r>
+          </a:p>
+        </p:txBody>
+      </p:sp>
+      <p:sp>
+        <p:nvSpPr>
+          <p:cNvPr id="5" name="TextBox 4"/>
+          <p:cNvSpPr txBox="1"/>
+          <p:nvPr/>
+        </p:nvSpPr>
+        <p:spPr>
+          <a:xfrm>
+            <a:off x="640080" y="3753612"/>
+            <a:ext cx="10911535" cy="365760"/>
+          </a:xfrm>
+          <a:prstGeom prst="rect">
+            <a:avLst/>
+          </a:prstGeom>
+          <a:noFill/>
+        </p:spPr>
+        <p:txBody>
+          <a:bodyPr wrap="square">
+            <a:spAutoFit/>
+          </a:bodyPr>
+          <a:lstStyle/>
+          <a:p>
+            <a:pPr algn="ctr"/>
+            <a:r>
+              <a:rPr sz="2400" b="0" i="1">
+                <a:solidFill>
+                  <a:srgbClr val="AAAAAA"/>
+                </a:solidFill>
+                <a:latin typeface="Arial"/>
+              </a:rPr>
+              <a:t>megu mito makotoni    mi chiteo rare rushu</a:t>
+            </a:r>
+          </a:p>
+        </p:txBody>
+      </p:sp>
+      <p:sp>
+        <p:nvSpPr>
+          <p:cNvPr id="6" name="TextBox 5"/>
+          <p:cNvSpPr txBox="1"/>
+          <p:nvPr/>
+        </p:nvSpPr>
+        <p:spPr>
+          <a:xfrm>
+            <a:off x="640080" y="4530852"/>
+            <a:ext cx="10911535" cy="310896"/>
           </a:xfrm>
           <a:prstGeom prst="rect">
             <a:avLst/>
@@ -3550,7 +3550,7 @@
             <a:r>
               <a:rPr sz="2000" b="0" i="1">
                 <a:solidFill>
-                  <a:srgbClr val="8C8C8C"/>
+                  <a:srgbClr val="828282"/>
                 </a:solidFill>
                 <a:latin typeface="Arial"/>
               </a:rPr>
@@ -3561,84 +3561,14 @@
       </p:sp>
       <p:sp>
         <p:nvSpPr>
-          <p:cNvPr id="5" name="TextBox 4"/>
-          <p:cNvSpPr txBox="1"/>
-          <p:nvPr/>
-        </p:nvSpPr>
-        <p:spPr>
-          <a:xfrm>
-            <a:off x="594360" y="3529584"/>
-            <a:ext cx="11002975" cy="685800"/>
-          </a:xfrm>
-          <a:prstGeom prst="rect">
-            <a:avLst/>
-          </a:prstGeom>
-          <a:noFill/>
-        </p:spPr>
-        <p:txBody>
-          <a:bodyPr wrap="square">
-            <a:spAutoFit/>
-          </a:bodyPr>
-          <a:lstStyle/>
-          <a:p>
-            <a:pPr algn="ctr"/>
-            <a:r>
-              <a:rPr sz="4400" b="1" i="0">
-                <a:solidFill>
-                  <a:srgbClr val="FFFFFF"/>
-                </a:solidFill>
-                <a:latin typeface="Arial"/>
-              </a:rPr>
-              <a:t>めぐみと  まことに 満ちておられる主</a:t>
-            </a:r>
-          </a:p>
-        </p:txBody>
-      </p:sp>
-      <p:sp>
-        <p:nvSpPr>
-          <p:cNvPr id="6" name="TextBox 5"/>
-          <p:cNvSpPr txBox="1"/>
-          <p:nvPr/>
-        </p:nvSpPr>
-        <p:spPr>
-          <a:xfrm>
-            <a:off x="594360" y="4251960"/>
-            <a:ext cx="11002975" cy="384048"/>
-          </a:xfrm>
-          <a:prstGeom prst="rect">
-            <a:avLst/>
-          </a:prstGeom>
-          <a:noFill/>
-        </p:spPr>
-        <p:txBody>
-          <a:bodyPr wrap="square">
-            <a:spAutoFit/>
-          </a:bodyPr>
-          <a:lstStyle/>
-          <a:p>
-            <a:pPr algn="ctr"/>
-            <a:r>
-              <a:rPr sz="2400" b="0" i="1">
-                <a:solidFill>
-                  <a:srgbClr val="B4B4B4"/>
-                </a:solidFill>
-                <a:latin typeface="Arial"/>
-              </a:rPr>
-              <a:t>megu mito makotoni    mi chiteo rare rushu</a:t>
-            </a:r>
-          </a:p>
-        </p:txBody>
-      </p:sp>
-      <p:sp>
-        <p:nvSpPr>
           <p:cNvPr id="7" name="TextBox 6"/>
           <p:cNvSpPr txBox="1"/>
           <p:nvPr/>
         </p:nvSpPr>
         <p:spPr>
           <a:xfrm>
-            <a:off x="594360" y="4672584"/>
-            <a:ext cx="11002975" cy="347472"/>
+            <a:off x="640080" y="4896612"/>
+            <a:ext cx="10911535" cy="310896"/>
           </a:xfrm>
           <a:prstGeom prst="rect">
             <a:avLst/>
@@ -3655,7 +3585,7 @@
             <a:r>
               <a:rPr sz="2000" b="0" i="1">
                 <a:solidFill>
-                  <a:srgbClr val="8C8C8C"/>
+                  <a:srgbClr val="828282"/>
                 </a:solidFill>
                 <a:latin typeface="Arial"/>
               </a:rPr>
@@ -3698,23 +3628,23 @@
         </p:nvSpPr>
         <p:spPr>
           <a:xfrm>
-            <a:off x="594360" y="1837944"/>
-            <a:ext cx="11002975" cy="685800"/>
-          </a:xfrm>
-          <a:prstGeom prst="rect">
-            <a:avLst/>
-          </a:prstGeom>
-          <a:noFill/>
-        </p:spPr>
-        <p:txBody>
-          <a:bodyPr wrap="square">
-            <a:spAutoFit/>
-          </a:bodyPr>
-          <a:lstStyle/>
-          <a:p>
-            <a:pPr algn="ctr"/>
-            <a:r>
-              <a:rPr sz="4400" b="1" i="0">
+            <a:off x="640080" y="1650492"/>
+            <a:ext cx="10911535" cy="731520"/>
+          </a:xfrm>
+          <a:prstGeom prst="rect">
+            <a:avLst/>
+          </a:prstGeom>
+          <a:noFill/>
+        </p:spPr>
+        <p:txBody>
+          <a:bodyPr wrap="square">
+            <a:spAutoFit/>
+          </a:bodyPr>
+          <a:lstStyle/>
+          <a:p>
+            <a:pPr algn="ctr"/>
+            <a:r>
+              <a:rPr sz="4800" b="1" i="0">
                 <a:solidFill>
                   <a:srgbClr val="FFFFFF"/>
                 </a:solidFill>
@@ -3733,8 +3663,8 @@
         </p:nvSpPr>
         <p:spPr>
           <a:xfrm>
-            <a:off x="594360" y="2560320"/>
-            <a:ext cx="11002975" cy="384048"/>
+            <a:off x="640080" y="2418588"/>
+            <a:ext cx="10911535" cy="365760"/>
           </a:xfrm>
           <a:prstGeom prst="rect">
             <a:avLst/>
@@ -3751,7 +3681,7 @@
             <a:r>
               <a:rPr sz="2400" b="0" i="1">
                 <a:solidFill>
-                  <a:srgbClr val="B4B4B4"/>
+                  <a:srgbClr val="AAAAAA"/>
                 </a:solidFill>
                 <a:latin typeface="Arial"/>
               </a:rPr>
@@ -3768,8 +3698,78 @@
         </p:nvSpPr>
         <p:spPr>
           <a:xfrm>
-            <a:off x="594360" y="2980944"/>
-            <a:ext cx="11002975" cy="347472"/>
+            <a:off x="640080" y="2985516"/>
+            <a:ext cx="10911535" cy="731520"/>
+          </a:xfrm>
+          <a:prstGeom prst="rect">
+            <a:avLst/>
+          </a:prstGeom>
+          <a:noFill/>
+        </p:spPr>
+        <p:txBody>
+          <a:bodyPr wrap="square">
+            <a:spAutoFit/>
+          </a:bodyPr>
+          <a:lstStyle/>
+          <a:p>
+            <a:pPr algn="ctr"/>
+            <a:r>
+              <a:rPr sz="4800" b="1" i="0">
+                <a:solidFill>
+                  <a:srgbClr val="FFFFFF"/>
+                </a:solidFill>
+                <a:latin typeface="Arial"/>
+              </a:rPr>
+              <a:t>その身に負われて人を救われた</a:t>
+            </a:r>
+          </a:p>
+        </p:txBody>
+      </p:sp>
+      <p:sp>
+        <p:nvSpPr>
+          <p:cNvPr id="5" name="TextBox 4"/>
+          <p:cNvSpPr txBox="1"/>
+          <p:nvPr/>
+        </p:nvSpPr>
+        <p:spPr>
+          <a:xfrm>
+            <a:off x="640080" y="3753612"/>
+            <a:ext cx="10911535" cy="365760"/>
+          </a:xfrm>
+          <a:prstGeom prst="rect">
+            <a:avLst/>
+          </a:prstGeom>
+          <a:noFill/>
+        </p:spPr>
+        <p:txBody>
+          <a:bodyPr wrap="square">
+            <a:spAutoFit/>
+          </a:bodyPr>
+          <a:lstStyle/>
+          <a:p>
+            <a:pPr algn="ctr"/>
+            <a:r>
+              <a:rPr sz="2400" b="0" i="1">
+                <a:solidFill>
+                  <a:srgbClr val="AAAAAA"/>
+                </a:solidFill>
+                <a:latin typeface="Arial"/>
+              </a:rPr>
+              <a:t>sonomini owarete       hi toosu kuwa reta</a:t>
+            </a:r>
+          </a:p>
+        </p:txBody>
+      </p:sp>
+      <p:sp>
+        <p:nvSpPr>
+          <p:cNvPr id="6" name="TextBox 5"/>
+          <p:cNvSpPr txBox="1"/>
+          <p:nvPr/>
+        </p:nvSpPr>
+        <p:spPr>
+          <a:xfrm>
+            <a:off x="640080" y="4530852"/>
+            <a:ext cx="10911535" cy="310896"/>
           </a:xfrm>
           <a:prstGeom prst="rect">
             <a:avLst/>
@@ -3786,7 +3786,7 @@
             <a:r>
               <a:rPr sz="2000" b="0" i="1">
                 <a:solidFill>
-                  <a:srgbClr val="8C8C8C"/>
+                  <a:srgbClr val="828282"/>
                 </a:solidFill>
                 <a:latin typeface="Arial"/>
               </a:rPr>
@@ -3797,84 +3797,14 @@
       </p:sp>
       <p:sp>
         <p:nvSpPr>
-          <p:cNvPr id="5" name="TextBox 4"/>
-          <p:cNvSpPr txBox="1"/>
-          <p:nvPr/>
-        </p:nvSpPr>
-        <p:spPr>
-          <a:xfrm>
-            <a:off x="594360" y="3529584"/>
-            <a:ext cx="11002975" cy="685800"/>
-          </a:xfrm>
-          <a:prstGeom prst="rect">
-            <a:avLst/>
-          </a:prstGeom>
-          <a:noFill/>
-        </p:spPr>
-        <p:txBody>
-          <a:bodyPr wrap="square">
-            <a:spAutoFit/>
-          </a:bodyPr>
-          <a:lstStyle/>
-          <a:p>
-            <a:pPr algn="ctr"/>
-            <a:r>
-              <a:rPr sz="4400" b="1" i="0">
-                <a:solidFill>
-                  <a:srgbClr val="FFFFFF"/>
-                </a:solidFill>
-                <a:latin typeface="Arial"/>
-              </a:rPr>
-              <a:t>その身に負われて人を救われた</a:t>
-            </a:r>
-          </a:p>
-        </p:txBody>
-      </p:sp>
-      <p:sp>
-        <p:nvSpPr>
-          <p:cNvPr id="6" name="TextBox 5"/>
-          <p:cNvSpPr txBox="1"/>
-          <p:nvPr/>
-        </p:nvSpPr>
-        <p:spPr>
-          <a:xfrm>
-            <a:off x="594360" y="4251960"/>
-            <a:ext cx="11002975" cy="384048"/>
-          </a:xfrm>
-          <a:prstGeom prst="rect">
-            <a:avLst/>
-          </a:prstGeom>
-          <a:noFill/>
-        </p:spPr>
-        <p:txBody>
-          <a:bodyPr wrap="square">
-            <a:spAutoFit/>
-          </a:bodyPr>
-          <a:lstStyle/>
-          <a:p>
-            <a:pPr algn="ctr"/>
-            <a:r>
-              <a:rPr sz="2400" b="0" i="1">
-                <a:solidFill>
-                  <a:srgbClr val="B4B4B4"/>
-                </a:solidFill>
-                <a:latin typeface="Arial"/>
-              </a:rPr>
-              <a:t>sonomini owarete       hi toosu kuwa reta</a:t>
-            </a:r>
-          </a:p>
-        </p:txBody>
-      </p:sp>
-      <p:sp>
-        <p:nvSpPr>
           <p:cNvPr id="7" name="TextBox 6"/>
           <p:cNvSpPr txBox="1"/>
           <p:nvPr/>
         </p:nvSpPr>
         <p:spPr>
           <a:xfrm>
-            <a:off x="594360" y="4672584"/>
-            <a:ext cx="11002975" cy="347472"/>
+            <a:off x="640080" y="4896612"/>
+            <a:ext cx="10911535" cy="310896"/>
           </a:xfrm>
           <a:prstGeom prst="rect">
             <a:avLst/>
@@ -3891,7 +3821,7 @@
             <a:r>
               <a:rPr sz="2000" b="0" i="1">
                 <a:solidFill>
-                  <a:srgbClr val="8C8C8C"/>
+                  <a:srgbClr val="828282"/>
                 </a:solidFill>
                 <a:latin typeface="Arial"/>
               </a:rPr>
@@ -3934,23 +3864,23 @@
         </p:nvSpPr>
         <p:spPr>
           <a:xfrm>
-            <a:off x="594360" y="2258568"/>
-            <a:ext cx="11002975" cy="685800"/>
-          </a:xfrm>
-          <a:prstGeom prst="rect">
-            <a:avLst/>
-          </a:prstGeom>
-          <a:noFill/>
-        </p:spPr>
-        <p:txBody>
-          <a:bodyPr wrap="square">
-            <a:spAutoFit/>
-          </a:bodyPr>
-          <a:lstStyle/>
-          <a:p>
-            <a:pPr algn="ctr"/>
-            <a:r>
-              <a:rPr sz="4400" b="1" i="0">
+            <a:off x="640080" y="2052828"/>
+            <a:ext cx="10911535" cy="731520"/>
+          </a:xfrm>
+          <a:prstGeom prst="rect">
+            <a:avLst/>
+          </a:prstGeom>
+          <a:noFill/>
+        </p:spPr>
+        <p:txBody>
+          <a:bodyPr wrap="square">
+            <a:spAutoFit/>
+          </a:bodyPr>
+          <a:lstStyle/>
+          <a:p>
+            <a:pPr algn="ctr"/>
+            <a:r>
+              <a:rPr sz="4800" b="1" i="0">
                 <a:solidFill>
                   <a:srgbClr val="FFFFFF"/>
                 </a:solidFill>
@@ -3969,25 +3899,60 @@
         </p:nvSpPr>
         <p:spPr>
           <a:xfrm>
-            <a:off x="594360" y="2980944"/>
-            <a:ext cx="11002975" cy="347472"/>
-          </a:xfrm>
-          <a:prstGeom prst="rect">
-            <a:avLst/>
-          </a:prstGeom>
-          <a:noFill/>
-        </p:spPr>
-        <p:txBody>
-          <a:bodyPr wrap="square">
-            <a:spAutoFit/>
-          </a:bodyPr>
-          <a:lstStyle/>
-          <a:p>
-            <a:pPr algn="ctr"/>
-            <a:r>
-              <a:rPr sz="2200" b="0" i="1">
-                <a:solidFill>
-                  <a:srgbClr val="8C8C8C"/>
+            <a:off x="640080" y="2985516"/>
+            <a:ext cx="10911535" cy="731520"/>
+          </a:xfrm>
+          <a:prstGeom prst="rect">
+            <a:avLst/>
+          </a:prstGeom>
+          <a:noFill/>
+        </p:spPr>
+        <p:txBody>
+          <a:bodyPr wrap="square">
+            <a:spAutoFit/>
+          </a:bodyPr>
+          <a:lstStyle/>
+          <a:p>
+            <a:pPr algn="ctr"/>
+            <a:r>
+              <a:rPr sz="4100" b="1" i="0">
+                <a:solidFill>
+                  <a:srgbClr val="FFFFFF"/>
+                </a:solidFill>
+                <a:latin typeface="Arial"/>
+              </a:rPr>
+              <a:t>A luz do mundo, pela escuridão, morta</a:t>
+            </a:r>
+          </a:p>
+        </p:txBody>
+      </p:sp>
+      <p:sp>
+        <p:nvSpPr>
+          <p:cNvPr id="4" name="TextBox 3"/>
+          <p:cNvSpPr txBox="1"/>
+          <p:nvPr/>
+        </p:nvSpPr>
+        <p:spPr>
+          <a:xfrm>
+            <a:off x="640080" y="4128516"/>
+            <a:ext cx="10911535" cy="310896"/>
+          </a:xfrm>
+          <a:prstGeom prst="rect">
+            <a:avLst/>
+          </a:prstGeom>
+          <a:noFill/>
+        </p:spPr>
+        <p:txBody>
+          <a:bodyPr wrap="square">
+            <a:spAutoFit/>
+          </a:bodyPr>
+          <a:lstStyle/>
+          <a:p>
+            <a:pPr algn="ctr"/>
+            <a:r>
+              <a:rPr sz="2000" b="0" i="0">
+                <a:solidFill>
+                  <a:srgbClr val="828282"/>
                 </a:solidFill>
                 <a:latin typeface="Arial"/>
               </a:rPr>
@@ -3998,66 +3963,31 @@
       </p:sp>
       <p:sp>
         <p:nvSpPr>
-          <p:cNvPr id="4" name="TextBox 3"/>
-          <p:cNvSpPr txBox="1"/>
-          <p:nvPr/>
-        </p:nvSpPr>
-        <p:spPr>
-          <a:xfrm>
-            <a:off x="594360" y="3529584"/>
-            <a:ext cx="11002975" cy="685800"/>
-          </a:xfrm>
-          <a:prstGeom prst="rect">
-            <a:avLst/>
-          </a:prstGeom>
-          <a:noFill/>
-        </p:spPr>
-        <p:txBody>
-          <a:bodyPr wrap="square">
-            <a:spAutoFit/>
-          </a:bodyPr>
-          <a:lstStyle/>
-          <a:p>
-            <a:pPr algn="ctr"/>
-            <a:r>
-              <a:rPr sz="3805" b="1" i="0">
-                <a:solidFill>
-                  <a:srgbClr val="FFFFFF"/>
-                </a:solidFill>
-                <a:latin typeface="Arial"/>
-              </a:rPr>
-              <a:t>A luz do mundo, pela escuridão, morta</a:t>
-            </a:r>
-          </a:p>
-        </p:txBody>
-      </p:sp>
-      <p:sp>
-        <p:nvSpPr>
           <p:cNvPr id="5" name="TextBox 4"/>
           <p:cNvSpPr txBox="1"/>
           <p:nvPr/>
         </p:nvSpPr>
         <p:spPr>
           <a:xfrm>
-            <a:off x="594360" y="4251960"/>
-            <a:ext cx="11002975" cy="347472"/>
-          </a:xfrm>
-          <a:prstGeom prst="rect">
-            <a:avLst/>
-          </a:prstGeom>
-          <a:noFill/>
-        </p:spPr>
-        <p:txBody>
-          <a:bodyPr wrap="square">
-            <a:spAutoFit/>
-          </a:bodyPr>
-          <a:lstStyle/>
-          <a:p>
-            <a:pPr algn="ctr"/>
-            <a:r>
-              <a:rPr sz="2200" b="0" i="1">
-                <a:solidFill>
-                  <a:srgbClr val="8C8C8C"/>
+            <a:off x="640080" y="4494276"/>
+            <a:ext cx="10911535" cy="310896"/>
+          </a:xfrm>
+          <a:prstGeom prst="rect">
+            <a:avLst/>
+          </a:prstGeom>
+          <a:noFill/>
+        </p:spPr>
+        <p:txBody>
+          <a:bodyPr wrap="square">
+            <a:spAutoFit/>
+          </a:bodyPr>
+          <a:lstStyle/>
+          <a:p>
+            <a:pPr algn="ctr"/>
+            <a:r>
+              <a:rPr sz="2000" b="0" i="0">
+                <a:solidFill>
+                  <a:srgbClr val="828282"/>
                 </a:solidFill>
                 <a:latin typeface="Arial"/>
               </a:rPr>
@@ -4100,23 +4030,23 @@
         </p:nvSpPr>
         <p:spPr>
           <a:xfrm>
-            <a:off x="594360" y="2258568"/>
-            <a:ext cx="11002975" cy="685800"/>
-          </a:xfrm>
-          <a:prstGeom prst="rect">
-            <a:avLst/>
-          </a:prstGeom>
-          <a:noFill/>
-        </p:spPr>
-        <p:txBody>
-          <a:bodyPr wrap="square">
-            <a:spAutoFit/>
-          </a:bodyPr>
-          <a:lstStyle/>
-          <a:p>
-            <a:pPr algn="ctr"/>
-            <a:r>
-              <a:rPr sz="4400" b="1" i="0">
+            <a:off x="640080" y="2052828"/>
+            <a:ext cx="10911535" cy="731520"/>
+          </a:xfrm>
+          <a:prstGeom prst="rect">
+            <a:avLst/>
+          </a:prstGeom>
+          <a:noFill/>
+        </p:spPr>
+        <p:txBody>
+          <a:bodyPr wrap="square">
+            <a:spAutoFit/>
+          </a:bodyPr>
+          <a:lstStyle/>
+          <a:p>
+            <a:pPr algn="ctr"/>
+            <a:r>
+              <a:rPr sz="4800" b="1" i="0">
                 <a:solidFill>
                   <a:srgbClr val="FFFFFF"/>
                 </a:solidFill>
@@ -4135,25 +4065,60 @@
         </p:nvSpPr>
         <p:spPr>
           <a:xfrm>
-            <a:off x="594360" y="2980944"/>
-            <a:ext cx="11002975" cy="347472"/>
-          </a:xfrm>
-          <a:prstGeom prst="rect">
-            <a:avLst/>
-          </a:prstGeom>
-          <a:noFill/>
-        </p:spPr>
-        <p:txBody>
-          <a:bodyPr wrap="square">
-            <a:spAutoFit/>
-          </a:bodyPr>
-          <a:lstStyle/>
-          <a:p>
-            <a:pPr algn="ctr"/>
-            <a:r>
-              <a:rPr sz="2200" b="0" i="1">
-                <a:solidFill>
-                  <a:srgbClr val="8C8C8C"/>
+            <a:off x="640080" y="2985516"/>
+            <a:ext cx="10911535" cy="731520"/>
+          </a:xfrm>
+          <a:prstGeom prst="rect">
+            <a:avLst/>
+          </a:prstGeom>
+          <a:noFill/>
+        </p:spPr>
+        <p:txBody>
+          <a:bodyPr wrap="square">
+            <a:spAutoFit/>
+          </a:bodyPr>
+          <a:lstStyle/>
+          <a:p>
+            <a:pPr algn="ctr"/>
+            <a:r>
+              <a:rPr sz="4800" b="1" i="0">
+                <a:solidFill>
+                  <a:srgbClr val="FFFFFF"/>
+                </a:solidFill>
+                <a:latin typeface="Arial"/>
+              </a:rPr>
+              <a:t>Da sepultura Ele ressurgiu</a:t>
+            </a:r>
+          </a:p>
+        </p:txBody>
+      </p:sp>
+      <p:sp>
+        <p:nvSpPr>
+          <p:cNvPr id="4" name="TextBox 3"/>
+          <p:cNvSpPr txBox="1"/>
+          <p:nvPr/>
+        </p:nvSpPr>
+        <p:spPr>
+          <a:xfrm>
+            <a:off x="640080" y="4128516"/>
+            <a:ext cx="10911535" cy="310896"/>
+          </a:xfrm>
+          <a:prstGeom prst="rect">
+            <a:avLst/>
+          </a:prstGeom>
+          <a:noFill/>
+        </p:spPr>
+        <p:txBody>
+          <a:bodyPr wrap="square">
+            <a:spAutoFit/>
+          </a:bodyPr>
+          <a:lstStyle/>
+          <a:p>
+            <a:pPr algn="ctr"/>
+            <a:r>
+              <a:rPr sz="2000" b="0" i="0">
+                <a:solidFill>
+                  <a:srgbClr val="828282"/>
                 </a:solidFill>
                 <a:latin typeface="Arial"/>
               </a:rPr>
@@ -4164,66 +4129,31 @@
       </p:sp>
       <p:sp>
         <p:nvSpPr>
-          <p:cNvPr id="4" name="TextBox 3"/>
-          <p:cNvSpPr txBox="1"/>
-          <p:nvPr/>
-        </p:nvSpPr>
-        <p:spPr>
-          <a:xfrm>
-            <a:off x="594360" y="3529584"/>
-            <a:ext cx="11002975" cy="685800"/>
-          </a:xfrm>
-          <a:prstGeom prst="rect">
-            <a:avLst/>
-          </a:prstGeom>
-          <a:noFill/>
-        </p:spPr>
-        <p:txBody>
-          <a:bodyPr wrap="square">
-            <a:spAutoFit/>
-          </a:bodyPr>
-          <a:lstStyle/>
-          <a:p>
-            <a:pPr algn="ctr"/>
-            <a:r>
-              <a:rPr sz="4400" b="1" i="0">
-                <a:solidFill>
-                  <a:srgbClr val="FFFFFF"/>
-                </a:solidFill>
-                <a:latin typeface="Arial"/>
-              </a:rPr>
-              <a:t>Da sepultura Ele ressurgiu</a:t>
-            </a:r>
-          </a:p>
-        </p:txBody>
-      </p:sp>
-      <p:sp>
-        <p:nvSpPr>
           <p:cNvPr id="5" name="TextBox 4"/>
           <p:cNvSpPr txBox="1"/>
           <p:nvPr/>
         </p:nvSpPr>
         <p:spPr>
           <a:xfrm>
-            <a:off x="594360" y="4251960"/>
-            <a:ext cx="11002975" cy="347472"/>
-          </a:xfrm>
-          <a:prstGeom prst="rect">
-            <a:avLst/>
-          </a:prstGeom>
-          <a:noFill/>
-        </p:spPr>
-        <p:txBody>
-          <a:bodyPr wrap="square">
-            <a:spAutoFit/>
-          </a:bodyPr>
-          <a:lstStyle/>
-          <a:p>
-            <a:pPr algn="ctr"/>
-            <a:r>
-              <a:rPr sz="2200" b="0" i="1">
-                <a:solidFill>
-                  <a:srgbClr val="8C8C8C"/>
+            <a:off x="640080" y="4494276"/>
+            <a:ext cx="10911535" cy="310896"/>
+          </a:xfrm>
+          <a:prstGeom prst="rect">
+            <a:avLst/>
+          </a:prstGeom>
+          <a:noFill/>
+        </p:spPr>
+        <p:txBody>
+          <a:bodyPr wrap="square">
+            <a:spAutoFit/>
+          </a:bodyPr>
+          <a:lstStyle/>
+          <a:p>
+            <a:pPr algn="ctr"/>
+            <a:r>
+              <a:rPr sz="2000" b="0" i="0">
+                <a:solidFill>
+                  <a:srgbClr val="828282"/>
                 </a:solidFill>
                 <a:latin typeface="Arial"/>
               </a:rPr>
@@ -4266,23 +4196,23 @@
         </p:nvSpPr>
         <p:spPr>
           <a:xfrm>
-            <a:off x="594360" y="2258568"/>
-            <a:ext cx="11002975" cy="685800"/>
-          </a:xfrm>
-          <a:prstGeom prst="rect">
-            <a:avLst/>
-          </a:prstGeom>
-          <a:noFill/>
-        </p:spPr>
-        <p:txBody>
-          <a:bodyPr wrap="square">
-            <a:spAutoFit/>
-          </a:bodyPr>
-          <a:lstStyle/>
-          <a:p>
-            <a:pPr algn="ctr"/>
-            <a:r>
-              <a:rPr sz="4400" b="1" i="0">
+            <a:off x="640080" y="2052828"/>
+            <a:ext cx="10911535" cy="731520"/>
+          </a:xfrm>
+          <a:prstGeom prst="rect">
+            <a:avLst/>
+          </a:prstGeom>
+          <a:noFill/>
+        </p:spPr>
+        <p:txBody>
+          <a:bodyPr wrap="square">
+            <a:spAutoFit/>
+          </a:bodyPr>
+          <a:lstStyle/>
+          <a:p>
+            <a:pPr algn="ctr"/>
+            <a:r>
+              <a:rPr sz="4800" b="1" i="0">
                 <a:solidFill>
                   <a:srgbClr val="FFFFFF"/>
                 </a:solidFill>
@@ -4301,99 +4231,29 @@
         </p:nvSpPr>
         <p:spPr>
           <a:xfrm>
-            <a:off x="594360" y="2980944"/>
-            <a:ext cx="11002975" cy="347472"/>
-          </a:xfrm>
-          <a:prstGeom prst="rect">
-            <a:avLst/>
-          </a:prstGeom>
-          <a:noFill/>
-        </p:spPr>
-        <p:txBody>
-          <a:bodyPr wrap="square">
-            <a:spAutoFit/>
-          </a:bodyPr>
-          <a:lstStyle/>
-          <a:p>
-            <a:pPr algn="ctr"/>
-            <a:r>
-              <a:rPr sz="2200" b="0" i="1">
-                <a:solidFill>
-                  <a:srgbClr val="8C8C8C"/>
-                </a:solidFill>
-                <a:latin typeface="Arial"/>
-              </a:rPr>
-              <a:t/>
-            </a:r>
-          </a:p>
-        </p:txBody>
-      </p:sp>
-      <p:sp>
-        <p:nvSpPr>
-          <p:cNvPr id="4" name="TextBox 3"/>
-          <p:cNvSpPr txBox="1"/>
-          <p:nvPr/>
-        </p:nvSpPr>
-        <p:spPr>
-          <a:xfrm>
-            <a:off x="594360" y="3529584"/>
-            <a:ext cx="11002975" cy="685800"/>
-          </a:xfrm>
-          <a:prstGeom prst="rect">
-            <a:avLst/>
-          </a:prstGeom>
-          <a:noFill/>
-        </p:spPr>
-        <p:txBody>
-          <a:bodyPr wrap="square">
-            <a:spAutoFit/>
-          </a:bodyPr>
-          <a:lstStyle/>
-          <a:p>
-            <a:pPr algn="ctr"/>
-            <a:r>
-              <a:rPr sz="4022" b="1" i="0">
+            <a:off x="640080" y="2985516"/>
+            <a:ext cx="10911535" cy="731520"/>
+          </a:xfrm>
+          <a:prstGeom prst="rect">
+            <a:avLst/>
+          </a:prstGeom>
+          <a:noFill/>
+        </p:spPr>
+        <p:txBody>
+          <a:bodyPr wrap="square">
+            <a:spAutoFit/>
+          </a:bodyPr>
+          <a:lstStyle/>
+          <a:p>
+            <a:pPr algn="ctr"/>
+            <a:r>
+              <a:rPr sz="4300" b="1" i="0">
                 <a:solidFill>
                   <a:srgbClr val="FFFFFF"/>
                 </a:solidFill>
                 <a:latin typeface="Arial"/>
               </a:rPr>
               <a:t>A maldição do pecado perdeu o poder</a:t>
-            </a:r>
-          </a:p>
-        </p:txBody>
-      </p:sp>
-      <p:sp>
-        <p:nvSpPr>
-          <p:cNvPr id="5" name="TextBox 4"/>
-          <p:cNvSpPr txBox="1"/>
-          <p:nvPr/>
-        </p:nvSpPr>
-        <p:spPr>
-          <a:xfrm>
-            <a:off x="594360" y="4251960"/>
-            <a:ext cx="11002975" cy="347472"/>
-          </a:xfrm>
-          <a:prstGeom prst="rect">
-            <a:avLst/>
-          </a:prstGeom>
-          <a:noFill/>
-        </p:spPr>
-        <p:txBody>
-          <a:bodyPr wrap="square">
-            <a:spAutoFit/>
-          </a:bodyPr>
-          <a:lstStyle/>
-          <a:p>
-            <a:pPr algn="ctr"/>
-            <a:r>
-              <a:rPr sz="2200" b="0" i="1">
-                <a:solidFill>
-                  <a:srgbClr val="8C8C8C"/>
-                </a:solidFill>
-                <a:latin typeface="Arial"/>
-              </a:rPr>
-              <a:t/>
             </a:r>
           </a:p>
         </p:txBody>
@@ -4432,23 +4292,23 @@
         </p:nvSpPr>
         <p:spPr>
           <a:xfrm>
-            <a:off x="594360" y="2258568"/>
-            <a:ext cx="11002975" cy="685800"/>
-          </a:xfrm>
-          <a:prstGeom prst="rect">
-            <a:avLst/>
-          </a:prstGeom>
-          <a:noFill/>
-        </p:spPr>
-        <p:txBody>
-          <a:bodyPr wrap="square">
-            <a:spAutoFit/>
-          </a:bodyPr>
-          <a:lstStyle/>
-          <a:p>
-            <a:pPr algn="ctr"/>
-            <a:r>
-              <a:rPr sz="4400" b="1" i="0">
+            <a:off x="640080" y="2052828"/>
+            <a:ext cx="10911535" cy="731520"/>
+          </a:xfrm>
+          <a:prstGeom prst="rect">
+            <a:avLst/>
+          </a:prstGeom>
+          <a:noFill/>
+        </p:spPr>
+        <p:txBody>
+          <a:bodyPr wrap="square">
+            <a:spAutoFit/>
+          </a:bodyPr>
+          <a:lstStyle/>
+          <a:p>
+            <a:pPr algn="ctr"/>
+            <a:r>
+              <a:rPr sz="4800" b="1" i="0">
                 <a:solidFill>
                   <a:srgbClr val="FFFFFF"/>
                 </a:solidFill>
@@ -4467,99 +4327,29 @@
         </p:nvSpPr>
         <p:spPr>
           <a:xfrm>
-            <a:off x="594360" y="2980944"/>
-            <a:ext cx="11002975" cy="347472"/>
-          </a:xfrm>
-          <a:prstGeom prst="rect">
-            <a:avLst/>
-          </a:prstGeom>
-          <a:noFill/>
-        </p:spPr>
-        <p:txBody>
-          <a:bodyPr wrap="square">
-            <a:spAutoFit/>
-          </a:bodyPr>
-          <a:lstStyle/>
-          <a:p>
-            <a:pPr algn="ctr"/>
-            <a:r>
-              <a:rPr sz="2200" b="0" i="1">
-                <a:solidFill>
-                  <a:srgbClr val="8C8C8C"/>
-                </a:solidFill>
-                <a:latin typeface="Arial"/>
-              </a:rPr>
-              <a:t/>
-            </a:r>
-          </a:p>
-        </p:txBody>
-      </p:sp>
-      <p:sp>
-        <p:nvSpPr>
-          <p:cNvPr id="4" name="TextBox 3"/>
-          <p:cNvSpPr txBox="1"/>
-          <p:nvPr/>
-        </p:nvSpPr>
-        <p:spPr>
-          <a:xfrm>
-            <a:off x="594360" y="3529584"/>
-            <a:ext cx="11002975" cy="685800"/>
-          </a:xfrm>
-          <a:prstGeom prst="rect">
-            <a:avLst/>
-          </a:prstGeom>
-          <a:noFill/>
-        </p:spPr>
-        <p:txBody>
-          <a:bodyPr wrap="square">
-            <a:spAutoFit/>
-          </a:bodyPr>
-          <a:lstStyle/>
-          <a:p>
-            <a:pPr algn="ctr"/>
-            <a:r>
-              <a:rPr sz="3520" b="1" i="0">
+            <a:off x="640080" y="2985516"/>
+            <a:ext cx="10911535" cy="731520"/>
+          </a:xfrm>
+          <a:prstGeom prst="rect">
+            <a:avLst/>
+          </a:prstGeom>
+          <a:noFill/>
+        </p:spPr>
+        <p:txBody>
+          <a:bodyPr wrap="square">
+            <a:spAutoFit/>
+          </a:bodyPr>
+          <a:lstStyle/>
+          <a:p>
+            <a:pPr algn="ctr"/>
+            <a:r>
+              <a:rPr sz="3800" b="1" i="0">
                 <a:solidFill>
                   <a:srgbClr val="FFFFFF"/>
                 </a:solidFill>
                 <a:latin typeface="Arial"/>
               </a:rPr>
               <a:t>Comprado com o precioso sangue de Cristo</a:t>
-            </a:r>
-          </a:p>
-        </p:txBody>
-      </p:sp>
-      <p:sp>
-        <p:nvSpPr>
-          <p:cNvPr id="5" name="TextBox 4"/>
-          <p:cNvSpPr txBox="1"/>
-          <p:nvPr/>
-        </p:nvSpPr>
-        <p:spPr>
-          <a:xfrm>
-            <a:off x="594360" y="4251960"/>
-            <a:ext cx="11002975" cy="347472"/>
-          </a:xfrm>
-          <a:prstGeom prst="rect">
-            <a:avLst/>
-          </a:prstGeom>
-          <a:noFill/>
-        </p:spPr>
-        <p:txBody>
-          <a:bodyPr wrap="square">
-            <a:spAutoFit/>
-          </a:bodyPr>
-          <a:lstStyle/>
-          <a:p>
-            <a:pPr algn="ctr"/>
-            <a:r>
-              <a:rPr sz="2200" b="0" i="1">
-                <a:solidFill>
-                  <a:srgbClr val="8C8C8C"/>
-                </a:solidFill>
-                <a:latin typeface="Arial"/>
-              </a:rPr>
-              <a:t/>
             </a:r>
           </a:p>
         </p:txBody>
@@ -4598,23 +4388,23 @@
         </p:nvSpPr>
         <p:spPr>
           <a:xfrm>
-            <a:off x="594360" y="1837944"/>
-            <a:ext cx="11002975" cy="685800"/>
-          </a:xfrm>
-          <a:prstGeom prst="rect">
-            <a:avLst/>
-          </a:prstGeom>
-          <a:noFill/>
-        </p:spPr>
-        <p:txBody>
-          <a:bodyPr wrap="square">
-            <a:spAutoFit/>
-          </a:bodyPr>
-          <a:lstStyle/>
-          <a:p>
-            <a:pPr algn="ctr"/>
-            <a:r>
-              <a:rPr sz="4400" b="1" i="0">
+            <a:off x="640080" y="1650492"/>
+            <a:ext cx="10911535" cy="731520"/>
+          </a:xfrm>
+          <a:prstGeom prst="rect">
+            <a:avLst/>
+          </a:prstGeom>
+          <a:noFill/>
+        </p:spPr>
+        <p:txBody>
+          <a:bodyPr wrap="square">
+            <a:spAutoFit/>
+          </a:bodyPr>
+          <a:lstStyle/>
+          <a:p>
+            <a:pPr algn="ctr"/>
+            <a:r>
+              <a:rPr sz="4800" b="1" i="0">
                 <a:solidFill>
                   <a:srgbClr val="FFFFFF"/>
                 </a:solidFill>
@@ -4633,8 +4423,8 @@
         </p:nvSpPr>
         <p:spPr>
           <a:xfrm>
-            <a:off x="594360" y="2560320"/>
-            <a:ext cx="11002975" cy="384048"/>
+            <a:off x="640080" y="2418588"/>
+            <a:ext cx="10911535" cy="365760"/>
           </a:xfrm>
           <a:prstGeom prst="rect">
             <a:avLst/>
@@ -4651,7 +4441,7 @@
             <a:r>
               <a:rPr sz="2400" b="0" i="1">
                 <a:solidFill>
-                  <a:srgbClr val="B4B4B4"/>
+                  <a:srgbClr val="AAAAAA"/>
                 </a:solidFill>
                 <a:latin typeface="Arial"/>
               </a:rPr>
@@ -4668,8 +4458,78 @@
         </p:nvSpPr>
         <p:spPr>
           <a:xfrm>
-            <a:off x="594360" y="2980944"/>
-            <a:ext cx="11002975" cy="347472"/>
+            <a:off x="640080" y="2985516"/>
+            <a:ext cx="10911535" cy="731520"/>
+          </a:xfrm>
+          <a:prstGeom prst="rect">
+            <a:avLst/>
+          </a:prstGeom>
+          <a:noFill/>
+        </p:spPr>
+        <p:txBody>
+          <a:bodyPr wrap="square">
+            <a:spAutoFit/>
+          </a:bodyPr>
+          <a:lstStyle/>
+          <a:p>
+            <a:pPr algn="ctr"/>
+            <a:r>
+              <a:rPr sz="4800" b="1" i="0">
+                <a:solidFill>
+                  <a:srgbClr val="FFFFFF"/>
+                </a:solidFill>
+                <a:latin typeface="Arial"/>
+              </a:rPr>
+              <a:t>かがやく  えいこう イェスのよみがえり</a:t>
+            </a:r>
+          </a:p>
+        </p:txBody>
+      </p:sp>
+      <p:sp>
+        <p:nvSpPr>
+          <p:cNvPr id="5" name="TextBox 4"/>
+          <p:cNvSpPr txBox="1"/>
+          <p:nvPr/>
+        </p:nvSpPr>
+        <p:spPr>
+          <a:xfrm>
+            <a:off x="640080" y="3753612"/>
+            <a:ext cx="10911535" cy="365760"/>
+          </a:xfrm>
+          <a:prstGeom prst="rect">
+            <a:avLst/>
+          </a:prstGeom>
+          <a:noFill/>
+        </p:spPr>
+        <p:txBody>
+          <a:bodyPr wrap="square">
+            <a:spAutoFit/>
+          </a:bodyPr>
+          <a:lstStyle/>
+          <a:p>
+            <a:pPr algn="ctr"/>
+            <a:r>
+              <a:rPr sz="2400" b="0" i="1">
+                <a:solidFill>
+                  <a:srgbClr val="AAAAAA"/>
+                </a:solidFill>
+                <a:latin typeface="Arial"/>
+              </a:rPr>
+              <a:t>kagayaku eikou             ye sunoyo miga eri</a:t>
+            </a:r>
+          </a:p>
+        </p:txBody>
+      </p:sp>
+      <p:sp>
+        <p:nvSpPr>
+          <p:cNvPr id="6" name="TextBox 5"/>
+          <p:cNvSpPr txBox="1"/>
+          <p:nvPr/>
+        </p:nvSpPr>
+        <p:spPr>
+          <a:xfrm>
+            <a:off x="640080" y="4530852"/>
+            <a:ext cx="10911535" cy="310896"/>
           </a:xfrm>
           <a:prstGeom prst="rect">
             <a:avLst/>
@@ -4686,7 +4546,7 @@
             <a:r>
               <a:rPr sz="2000" b="0" i="1">
                 <a:solidFill>
-                  <a:srgbClr val="8C8C8C"/>
+                  <a:srgbClr val="828282"/>
                 </a:solidFill>
                 <a:latin typeface="Arial"/>
               </a:rPr>
@@ -4697,84 +4557,14 @@
       </p:sp>
       <p:sp>
         <p:nvSpPr>
-          <p:cNvPr id="5" name="TextBox 4"/>
-          <p:cNvSpPr txBox="1"/>
-          <p:nvPr/>
-        </p:nvSpPr>
-        <p:spPr>
-          <a:xfrm>
-            <a:off x="594360" y="3529584"/>
-            <a:ext cx="11002975" cy="685800"/>
-          </a:xfrm>
-          <a:prstGeom prst="rect">
-            <a:avLst/>
-          </a:prstGeom>
-          <a:noFill/>
-        </p:spPr>
-        <p:txBody>
-          <a:bodyPr wrap="square">
-            <a:spAutoFit/>
-          </a:bodyPr>
-          <a:lstStyle/>
-          <a:p>
-            <a:pPr algn="ctr"/>
-            <a:r>
-              <a:rPr sz="4400" b="1" i="0">
-                <a:solidFill>
-                  <a:srgbClr val="FFFFFF"/>
-                </a:solidFill>
-                <a:latin typeface="Arial"/>
-              </a:rPr>
-              <a:t>かがやく  えいこう イェスのよみがえり</a:t>
-            </a:r>
-          </a:p>
-        </p:txBody>
-      </p:sp>
-      <p:sp>
-        <p:nvSpPr>
-          <p:cNvPr id="6" name="TextBox 5"/>
-          <p:cNvSpPr txBox="1"/>
-          <p:nvPr/>
-        </p:nvSpPr>
-        <p:spPr>
-          <a:xfrm>
-            <a:off x="594360" y="4251960"/>
-            <a:ext cx="11002975" cy="384048"/>
-          </a:xfrm>
-          <a:prstGeom prst="rect">
-            <a:avLst/>
-          </a:prstGeom>
-          <a:noFill/>
-        </p:spPr>
-        <p:txBody>
-          <a:bodyPr wrap="square">
-            <a:spAutoFit/>
-          </a:bodyPr>
-          <a:lstStyle/>
-          <a:p>
-            <a:pPr algn="ctr"/>
-            <a:r>
-              <a:rPr sz="2240" b="0" i="1">
-                <a:solidFill>
-                  <a:srgbClr val="B4B4B4"/>
-                </a:solidFill>
-                <a:latin typeface="Arial"/>
-              </a:rPr>
-              <a:t>kagayaku eikou             ye sunoyo miga eri</a:t>
-            </a:r>
-          </a:p>
-        </p:txBody>
-      </p:sp>
-      <p:sp>
-        <p:nvSpPr>
           <p:cNvPr id="7" name="TextBox 6"/>
           <p:cNvSpPr txBox="1"/>
           <p:nvPr/>
         </p:nvSpPr>
         <p:spPr>
           <a:xfrm>
-            <a:off x="594360" y="4672584"/>
-            <a:ext cx="11002975" cy="347472"/>
+            <a:off x="640080" y="4896612"/>
+            <a:ext cx="10911535" cy="310896"/>
           </a:xfrm>
           <a:prstGeom prst="rect">
             <a:avLst/>
@@ -4791,7 +4581,7 @@
             <a:r>
               <a:rPr sz="2000" b="0" i="1">
                 <a:solidFill>
-                  <a:srgbClr val="8C8C8C"/>
+                  <a:srgbClr val="828282"/>
                 </a:solidFill>
                 <a:latin typeface="Arial"/>
               </a:rPr>
@@ -4834,23 +4624,23 @@
         </p:nvSpPr>
         <p:spPr>
           <a:xfrm>
-            <a:off x="594360" y="1837944"/>
-            <a:ext cx="11002975" cy="685800"/>
-          </a:xfrm>
-          <a:prstGeom prst="rect">
-            <a:avLst/>
-          </a:prstGeom>
-          <a:noFill/>
-        </p:spPr>
-        <p:txBody>
-          <a:bodyPr wrap="square">
-            <a:spAutoFit/>
-          </a:bodyPr>
-          <a:lstStyle/>
-          <a:p>
-            <a:pPr algn="ctr"/>
-            <a:r>
-              <a:rPr sz="4400" b="1" i="0">
+            <a:off x="640080" y="1650492"/>
+            <a:ext cx="10911535" cy="731520"/>
+          </a:xfrm>
+          <a:prstGeom prst="rect">
+            <a:avLst/>
+          </a:prstGeom>
+          <a:noFill/>
+        </p:spPr>
+        <p:txBody>
+          <a:bodyPr wrap="square">
+            <a:spAutoFit/>
+          </a:bodyPr>
+          <a:lstStyle/>
+          <a:p>
+            <a:pPr algn="ctr"/>
+            <a:r>
+              <a:rPr sz="4800" b="1" i="0">
                 <a:solidFill>
                   <a:srgbClr val="FFFFFF"/>
                 </a:solidFill>
@@ -4869,25 +4659,25 @@
         </p:nvSpPr>
         <p:spPr>
           <a:xfrm>
-            <a:off x="594360" y="2560320"/>
-            <a:ext cx="11002975" cy="384048"/>
-          </a:xfrm>
-          <a:prstGeom prst="rect">
-            <a:avLst/>
-          </a:prstGeom>
-          <a:noFill/>
-        </p:spPr>
-        <p:txBody>
-          <a:bodyPr wrap="square">
-            <a:spAutoFit/>
-          </a:bodyPr>
-          <a:lstStyle/>
-          <a:p>
-            <a:pPr algn="ctr"/>
-            <a:r>
-              <a:rPr sz="2144" b="0" i="1">
-                <a:solidFill>
-                  <a:srgbClr val="B4B4B4"/>
+            <a:off x="640080" y="2418588"/>
+            <a:ext cx="10911535" cy="365760"/>
+          </a:xfrm>
+          <a:prstGeom prst="rect">
+            <a:avLst/>
+          </a:prstGeom>
+          <a:noFill/>
+        </p:spPr>
+        <p:txBody>
+          <a:bodyPr wrap="square">
+            <a:spAutoFit/>
+          </a:bodyPr>
+          <a:lstStyle/>
+          <a:p>
+            <a:pPr algn="ctr"/>
+            <a:r>
+              <a:rPr sz="2400" b="0" i="1">
+                <a:solidFill>
+                  <a:srgbClr val="AAAAAA"/>
                 </a:solidFill>
                 <a:latin typeface="Arial"/>
               </a:rPr>
@@ -4904,8 +4694,78 @@
         </p:nvSpPr>
         <p:spPr>
           <a:xfrm>
-            <a:off x="594360" y="2980944"/>
-            <a:ext cx="11002975" cy="347472"/>
+            <a:off x="640080" y="2985516"/>
+            <a:ext cx="10911535" cy="731520"/>
+          </a:xfrm>
+          <a:prstGeom prst="rect">
+            <a:avLst/>
+          </a:prstGeom>
+          <a:noFill/>
+        </p:spPr>
+        <p:txBody>
+          <a:bodyPr wrap="square">
+            <a:spAutoFit/>
+          </a:bodyPr>
+          <a:lstStyle/>
+          <a:p>
+            <a:pPr algn="ctr"/>
+            <a:r>
+              <a:rPr sz="4800" b="1" i="0">
+                <a:solidFill>
+                  <a:srgbClr val="FFFFFF"/>
+                </a:solidFill>
+                <a:latin typeface="Arial"/>
+              </a:rPr>
+              <a:t>とうとい血潮は私を  あがなう</a:t>
+            </a:r>
+          </a:p>
+        </p:txBody>
+      </p:sp>
+      <p:sp>
+        <p:nvSpPr>
+          <p:cNvPr id="5" name="TextBox 4"/>
+          <p:cNvSpPr txBox="1"/>
+          <p:nvPr/>
+        </p:nvSpPr>
+        <p:spPr>
+          <a:xfrm>
+            <a:off x="640080" y="3753612"/>
+            <a:ext cx="10911535" cy="365760"/>
+          </a:xfrm>
+          <a:prstGeom prst="rect">
+            <a:avLst/>
+          </a:prstGeom>
+          <a:noFill/>
+        </p:spPr>
+        <p:txBody>
+          <a:bodyPr wrap="square">
+            <a:spAutoFit/>
+          </a:bodyPr>
+          <a:lstStyle/>
+          <a:p>
+            <a:pPr algn="ctr"/>
+            <a:r>
+              <a:rPr sz="2400" b="0" i="1">
+                <a:solidFill>
+                  <a:srgbClr val="AAAAAA"/>
+                </a:solidFill>
+                <a:latin typeface="Arial"/>
+              </a:rPr>
+              <a:t>tootoi     chishiowa      wa tasio aga nau</a:t>
+            </a:r>
+          </a:p>
+        </p:txBody>
+      </p:sp>
+      <p:sp>
+        <p:nvSpPr>
+          <p:cNvPr id="6" name="TextBox 5"/>
+          <p:cNvSpPr txBox="1"/>
+          <p:nvPr/>
+        </p:nvSpPr>
+        <p:spPr>
+          <a:xfrm>
+            <a:off x="640080" y="4530852"/>
+            <a:ext cx="10911535" cy="310896"/>
           </a:xfrm>
           <a:prstGeom prst="rect">
             <a:avLst/>
@@ -4922,7 +4782,7 @@
             <a:r>
               <a:rPr sz="2000" b="0" i="1">
                 <a:solidFill>
-                  <a:srgbClr val="8C8C8C"/>
+                  <a:srgbClr val="828282"/>
                 </a:solidFill>
                 <a:latin typeface="Arial"/>
               </a:rPr>
@@ -4933,84 +4793,14 @@
       </p:sp>
       <p:sp>
         <p:nvSpPr>
-          <p:cNvPr id="5" name="TextBox 4"/>
-          <p:cNvSpPr txBox="1"/>
-          <p:nvPr/>
-        </p:nvSpPr>
-        <p:spPr>
-          <a:xfrm>
-            <a:off x="594360" y="3529584"/>
-            <a:ext cx="11002975" cy="685800"/>
-          </a:xfrm>
-          <a:prstGeom prst="rect">
-            <a:avLst/>
-          </a:prstGeom>
-          <a:noFill/>
-        </p:spPr>
-        <p:txBody>
-          <a:bodyPr wrap="square">
-            <a:spAutoFit/>
-          </a:bodyPr>
-          <a:lstStyle/>
-          <a:p>
-            <a:pPr algn="ctr"/>
-            <a:r>
-              <a:rPr sz="4400" b="1" i="0">
-                <a:solidFill>
-                  <a:srgbClr val="FFFFFF"/>
-                </a:solidFill>
-                <a:latin typeface="Arial"/>
-              </a:rPr>
-              <a:t>とうとい血潮は私を  あがなう</a:t>
-            </a:r>
-          </a:p>
-        </p:txBody>
-      </p:sp>
-      <p:sp>
-        <p:nvSpPr>
-          <p:cNvPr id="6" name="TextBox 5"/>
-          <p:cNvSpPr txBox="1"/>
-          <p:nvPr/>
-        </p:nvSpPr>
-        <p:spPr>
-          <a:xfrm>
-            <a:off x="594360" y="4251960"/>
-            <a:ext cx="11002975" cy="384048"/>
-          </a:xfrm>
-          <a:prstGeom prst="rect">
-            <a:avLst/>
-          </a:prstGeom>
-          <a:noFill/>
-        </p:spPr>
-        <p:txBody>
-          <a:bodyPr wrap="square">
-            <a:spAutoFit/>
-          </a:bodyPr>
-          <a:lstStyle/>
-          <a:p>
-            <a:pPr algn="ctr"/>
-            <a:r>
-              <a:rPr sz="2400" b="0" i="1">
-                <a:solidFill>
-                  <a:srgbClr val="B4B4B4"/>
-                </a:solidFill>
-                <a:latin typeface="Arial"/>
-              </a:rPr>
-              <a:t>tootoi     chishiowa      wa tasio aga nau</a:t>
-            </a:r>
-          </a:p>
-        </p:txBody>
-      </p:sp>
-      <p:sp>
-        <p:nvSpPr>
           <p:cNvPr id="7" name="TextBox 6"/>
           <p:cNvSpPr txBox="1"/>
           <p:nvPr/>
         </p:nvSpPr>
         <p:spPr>
           <a:xfrm>
-            <a:off x="594360" y="4672584"/>
-            <a:ext cx="11002975" cy="347472"/>
+            <a:off x="640080" y="4896612"/>
+            <a:ext cx="10911535" cy="310896"/>
           </a:xfrm>
           <a:prstGeom prst="rect">
             <a:avLst/>
@@ -5027,7 +4817,7 @@
             <a:r>
               <a:rPr sz="2000" b="0" i="1">
                 <a:solidFill>
-                  <a:srgbClr val="8C8C8C"/>
+                  <a:srgbClr val="828282"/>
                 </a:solidFill>
                 <a:latin typeface="Arial"/>
               </a:rPr>
@@ -5070,23 +4860,23 @@
         </p:nvSpPr>
         <p:spPr>
           <a:xfrm>
-            <a:off x="594360" y="2258568"/>
-            <a:ext cx="11002975" cy="685800"/>
-          </a:xfrm>
-          <a:prstGeom prst="rect">
-            <a:avLst/>
-          </a:prstGeom>
-          <a:noFill/>
-        </p:spPr>
-        <p:txBody>
-          <a:bodyPr wrap="square">
-            <a:spAutoFit/>
-          </a:bodyPr>
-          <a:lstStyle/>
-          <a:p>
-            <a:pPr algn="ctr"/>
-            <a:r>
-              <a:rPr sz="4400" b="1" i="0">
+            <a:off x="640080" y="2052828"/>
+            <a:ext cx="10911535" cy="731520"/>
+          </a:xfrm>
+          <a:prstGeom prst="rect">
+            <a:avLst/>
+          </a:prstGeom>
+          <a:noFill/>
+        </p:spPr>
+        <p:txBody>
+          <a:bodyPr wrap="square">
+            <a:spAutoFit/>
+          </a:bodyPr>
+          <a:lstStyle/>
+          <a:p>
+            <a:pPr algn="ctr"/>
+            <a:r>
+              <a:rPr sz="4800" b="1" i="0">
                 <a:solidFill>
                   <a:srgbClr val="FFFFFF"/>
                 </a:solidFill>
@@ -5105,25 +4895,60 @@
         </p:nvSpPr>
         <p:spPr>
           <a:xfrm>
-            <a:off x="594360" y="2980944"/>
-            <a:ext cx="11002975" cy="347472"/>
-          </a:xfrm>
-          <a:prstGeom prst="rect">
-            <a:avLst/>
-          </a:prstGeom>
-          <a:noFill/>
-        </p:spPr>
-        <p:txBody>
-          <a:bodyPr wrap="square">
-            <a:spAutoFit/>
-          </a:bodyPr>
-          <a:lstStyle/>
-          <a:p>
-            <a:pPr algn="ctr"/>
-            <a:r>
-              <a:rPr sz="2200" b="0" i="1">
-                <a:solidFill>
-                  <a:srgbClr val="8C8C8C"/>
+            <a:off x="640080" y="2985516"/>
+            <a:ext cx="10911535" cy="731520"/>
+          </a:xfrm>
+          <a:prstGeom prst="rect">
+            <a:avLst/>
+          </a:prstGeom>
+          <a:noFill/>
+        </p:spPr>
+        <p:txBody>
+          <a:bodyPr wrap="square">
+            <a:spAutoFit/>
+          </a:bodyPr>
+          <a:lstStyle/>
+          <a:p>
+            <a:pPr algn="ctr"/>
+            <a:r>
+              <a:rPr sz="4300" b="1" i="0">
+                <a:solidFill>
+                  <a:srgbClr val="FFFFFF"/>
+                </a:solidFill>
+                <a:latin typeface="Arial"/>
+              </a:rPr>
+              <a:t>Do primeiro choro ao último suspiro</a:t>
+            </a:r>
+          </a:p>
+        </p:txBody>
+      </p:sp>
+      <p:sp>
+        <p:nvSpPr>
+          <p:cNvPr id="4" name="TextBox 3"/>
+          <p:cNvSpPr txBox="1"/>
+          <p:nvPr/>
+        </p:nvSpPr>
+        <p:spPr>
+          <a:xfrm>
+            <a:off x="640080" y="4128516"/>
+            <a:ext cx="10911535" cy="310896"/>
+          </a:xfrm>
+          <a:prstGeom prst="rect">
+            <a:avLst/>
+          </a:prstGeom>
+          <a:noFill/>
+        </p:spPr>
+        <p:txBody>
+          <a:bodyPr wrap="square">
+            <a:spAutoFit/>
+          </a:bodyPr>
+          <a:lstStyle/>
+          <a:p>
+            <a:pPr algn="ctr"/>
+            <a:r>
+              <a:rPr sz="2000" b="0" i="0">
+                <a:solidFill>
+                  <a:srgbClr val="828282"/>
                 </a:solidFill>
                 <a:latin typeface="Arial"/>
               </a:rPr>
@@ -5134,66 +4959,31 @@
       </p:sp>
       <p:sp>
         <p:nvSpPr>
-          <p:cNvPr id="4" name="TextBox 3"/>
-          <p:cNvSpPr txBox="1"/>
-          <p:nvPr/>
-        </p:nvSpPr>
-        <p:spPr>
-          <a:xfrm>
-            <a:off x="594360" y="3529584"/>
-            <a:ext cx="11002975" cy="685800"/>
-          </a:xfrm>
-          <a:prstGeom prst="rect">
-            <a:avLst/>
-          </a:prstGeom>
-          <a:noFill/>
-        </p:spPr>
-        <p:txBody>
-          <a:bodyPr wrap="square">
-            <a:spAutoFit/>
-          </a:bodyPr>
-          <a:lstStyle/>
-          <a:p>
-            <a:pPr algn="ctr"/>
-            <a:r>
-              <a:rPr sz="4022" b="1" i="0">
-                <a:solidFill>
-                  <a:srgbClr val="FFFFFF"/>
-                </a:solidFill>
-                <a:latin typeface="Arial"/>
-              </a:rPr>
-              <a:t>Do primeiro choro ao último suspiro</a:t>
-            </a:r>
-          </a:p>
-        </p:txBody>
-      </p:sp>
-      <p:sp>
-        <p:nvSpPr>
           <p:cNvPr id="5" name="TextBox 4"/>
           <p:cNvSpPr txBox="1"/>
           <p:nvPr/>
         </p:nvSpPr>
         <p:spPr>
           <a:xfrm>
-            <a:off x="594360" y="4251960"/>
-            <a:ext cx="11002975" cy="347472"/>
-          </a:xfrm>
-          <a:prstGeom prst="rect">
-            <a:avLst/>
-          </a:prstGeom>
-          <a:noFill/>
-        </p:spPr>
-        <p:txBody>
-          <a:bodyPr wrap="square">
-            <a:spAutoFit/>
-          </a:bodyPr>
-          <a:lstStyle/>
-          <a:p>
-            <a:pPr algn="ctr"/>
-            <a:r>
-              <a:rPr sz="2200" b="0" i="1">
-                <a:solidFill>
-                  <a:srgbClr val="8C8C8C"/>
+            <a:off x="640080" y="4494276"/>
+            <a:ext cx="10911535" cy="310896"/>
+          </a:xfrm>
+          <a:prstGeom prst="rect">
+            <a:avLst/>
+          </a:prstGeom>
+          <a:noFill/>
+        </p:spPr>
+        <p:txBody>
+          <a:bodyPr wrap="square">
+            <a:spAutoFit/>
+          </a:bodyPr>
+          <a:lstStyle/>
+          <a:p>
+            <a:pPr algn="ctr"/>
+            <a:r>
+              <a:rPr sz="2000" b="0" i="0">
+                <a:solidFill>
+                  <a:srgbClr val="828282"/>
                 </a:solidFill>
                 <a:latin typeface="Arial"/>
               </a:rPr>
@@ -5236,23 +5026,23 @@
         </p:nvSpPr>
         <p:spPr>
           <a:xfrm>
-            <a:off x="594360" y="2258568"/>
-            <a:ext cx="11002975" cy="685800"/>
-          </a:xfrm>
-          <a:prstGeom prst="rect">
-            <a:avLst/>
-          </a:prstGeom>
-          <a:noFill/>
-        </p:spPr>
-        <p:txBody>
-          <a:bodyPr wrap="square">
-            <a:spAutoFit/>
-          </a:bodyPr>
-          <a:lstStyle/>
-          <a:p>
-            <a:pPr algn="ctr"/>
-            <a:r>
-              <a:rPr sz="3352" b="1" i="0">
+            <a:off x="640080" y="2052828"/>
+            <a:ext cx="10911535" cy="731520"/>
+          </a:xfrm>
+          <a:prstGeom prst="rect">
+            <a:avLst/>
+          </a:prstGeom>
+          <a:noFill/>
+        </p:spPr>
+        <p:txBody>
+          <a:bodyPr wrap="square">
+            <a:spAutoFit/>
+          </a:bodyPr>
+          <a:lstStyle/>
+          <a:p>
+            <a:pPr algn="ctr"/>
+            <a:r>
+              <a:rPr sz="3600" b="1" i="0">
                 <a:solidFill>
                   <a:srgbClr val="FFFFFF"/>
                 </a:solidFill>
@@ -5271,25 +5061,60 @@
         </p:nvSpPr>
         <p:spPr>
           <a:xfrm>
-            <a:off x="594360" y="2980944"/>
-            <a:ext cx="11002975" cy="347472"/>
-          </a:xfrm>
-          <a:prstGeom prst="rect">
-            <a:avLst/>
-          </a:prstGeom>
-          <a:noFill/>
-        </p:spPr>
-        <p:txBody>
-          <a:bodyPr wrap="square">
-            <a:spAutoFit/>
-          </a:bodyPr>
-          <a:lstStyle/>
-          <a:p>
-            <a:pPr algn="ctr"/>
-            <a:r>
-              <a:rPr sz="2200" b="0" i="1">
-                <a:solidFill>
-                  <a:srgbClr val="8C8C8C"/>
+            <a:off x="640080" y="2985516"/>
+            <a:ext cx="10911535" cy="731520"/>
+          </a:xfrm>
+          <a:prstGeom prst="rect">
+            <a:avLst/>
+          </a:prstGeom>
+          <a:noFill/>
+        </p:spPr>
+        <p:txBody>
+          <a:bodyPr wrap="square">
+            <a:spAutoFit/>
+          </a:bodyPr>
+          <a:lstStyle/>
+          <a:p>
+            <a:pPr algn="ctr"/>
+            <a:r>
+              <a:rPr sz="4200" b="1" i="0">
+                <a:solidFill>
+                  <a:srgbClr val="FFFFFF"/>
+                </a:solidFill>
+                <a:latin typeface="Arial"/>
+              </a:rPr>
+              <a:t>Esta pedra angular, esta terra firme</a:t>
+            </a:r>
+          </a:p>
+        </p:txBody>
+      </p:sp>
+      <p:sp>
+        <p:nvSpPr>
+          <p:cNvPr id="4" name="TextBox 3"/>
+          <p:cNvSpPr txBox="1"/>
+          <p:nvPr/>
+        </p:nvSpPr>
+        <p:spPr>
+          <a:xfrm>
+            <a:off x="640080" y="4128516"/>
+            <a:ext cx="10911535" cy="310896"/>
+          </a:xfrm>
+          <a:prstGeom prst="rect">
+            <a:avLst/>
+          </a:prstGeom>
+          <a:noFill/>
+        </p:spPr>
+        <p:txBody>
+          <a:bodyPr wrap="square">
+            <a:spAutoFit/>
+          </a:bodyPr>
+          <a:lstStyle/>
+          <a:p>
+            <a:pPr algn="ctr"/>
+            <a:r>
+              <a:rPr sz="2000" b="0" i="0">
+                <a:solidFill>
+                  <a:srgbClr val="828282"/>
                 </a:solidFill>
                 <a:latin typeface="Arial"/>
               </a:rPr>
@@ -5300,66 +5125,31 @@
       </p:sp>
       <p:sp>
         <p:nvSpPr>
-          <p:cNvPr id="4" name="TextBox 3"/>
-          <p:cNvSpPr txBox="1"/>
-          <p:nvPr/>
-        </p:nvSpPr>
-        <p:spPr>
-          <a:xfrm>
-            <a:off x="594360" y="3529584"/>
-            <a:ext cx="11002975" cy="685800"/>
-          </a:xfrm>
-          <a:prstGeom prst="rect">
-            <a:avLst/>
-          </a:prstGeom>
-          <a:noFill/>
-        </p:spPr>
-        <p:txBody>
-          <a:bodyPr wrap="square">
-            <a:spAutoFit/>
-          </a:bodyPr>
-          <a:lstStyle/>
-          <a:p>
-            <a:pPr algn="ctr"/>
-            <a:r>
-              <a:rPr sz="3911" b="1" i="0">
-                <a:solidFill>
-                  <a:srgbClr val="FFFFFF"/>
-                </a:solidFill>
-                <a:latin typeface="Arial"/>
-              </a:rPr>
-              <a:t>Esta pedra angular, esta terra firme</a:t>
-            </a:r>
-          </a:p>
-        </p:txBody>
-      </p:sp>
-      <p:sp>
-        <p:nvSpPr>
           <p:cNvPr id="5" name="TextBox 4"/>
           <p:cNvSpPr txBox="1"/>
           <p:nvPr/>
         </p:nvSpPr>
         <p:spPr>
           <a:xfrm>
-            <a:off x="594360" y="4251960"/>
-            <a:ext cx="11002975" cy="347472"/>
-          </a:xfrm>
-          <a:prstGeom prst="rect">
-            <a:avLst/>
-          </a:prstGeom>
-          <a:noFill/>
-        </p:spPr>
-        <p:txBody>
-          <a:bodyPr wrap="square">
-            <a:spAutoFit/>
-          </a:bodyPr>
-          <a:lstStyle/>
-          <a:p>
-            <a:pPr algn="ctr"/>
-            <a:r>
-              <a:rPr sz="2200" b="0" i="1">
-                <a:solidFill>
-                  <a:srgbClr val="8C8C8C"/>
+            <a:off x="640080" y="4494276"/>
+            <a:ext cx="10911535" cy="310896"/>
+          </a:xfrm>
+          <a:prstGeom prst="rect">
+            <a:avLst/>
+          </a:prstGeom>
+          <a:noFill/>
+        </p:spPr>
+        <p:txBody>
+          <a:bodyPr wrap="square">
+            <a:spAutoFit/>
+          </a:bodyPr>
+          <a:lstStyle/>
+          <a:p>
+            <a:pPr algn="ctr"/>
+            <a:r>
+              <a:rPr sz="2000" b="0" i="0">
+                <a:solidFill>
+                  <a:srgbClr val="828282"/>
                 </a:solidFill>
                 <a:latin typeface="Arial"/>
               </a:rPr>
@@ -5402,23 +5192,23 @@
         </p:nvSpPr>
         <p:spPr>
           <a:xfrm>
-            <a:off x="594360" y="2258568"/>
-            <a:ext cx="11002975" cy="685800"/>
-          </a:xfrm>
-          <a:prstGeom prst="rect">
-            <a:avLst/>
-          </a:prstGeom>
-          <a:noFill/>
-        </p:spPr>
-        <p:txBody>
-          <a:bodyPr wrap="square">
-            <a:spAutoFit/>
-          </a:bodyPr>
-          <a:lstStyle/>
-          <a:p>
-            <a:pPr algn="ctr"/>
-            <a:r>
-              <a:rPr sz="4400" b="1" i="0">
+            <a:off x="640080" y="2052828"/>
+            <a:ext cx="10911535" cy="731520"/>
+          </a:xfrm>
+          <a:prstGeom prst="rect">
+            <a:avLst/>
+          </a:prstGeom>
+          <a:noFill/>
+        </p:spPr>
+        <p:txBody>
+          <a:bodyPr wrap="square">
+            <a:spAutoFit/>
+          </a:bodyPr>
+          <a:lstStyle/>
+          <a:p>
+            <a:pPr algn="ctr"/>
+            <a:r>
+              <a:rPr sz="4800" b="1" i="0">
                 <a:solidFill>
                   <a:srgbClr val="FFFFFF"/>
                 </a:solidFill>
@@ -5437,25 +5227,60 @@
         </p:nvSpPr>
         <p:spPr>
           <a:xfrm>
-            <a:off x="594360" y="2980944"/>
-            <a:ext cx="11002975" cy="347472"/>
-          </a:xfrm>
-          <a:prstGeom prst="rect">
-            <a:avLst/>
-          </a:prstGeom>
-          <a:noFill/>
-        </p:spPr>
-        <p:txBody>
-          <a:bodyPr wrap="square">
-            <a:spAutoFit/>
-          </a:bodyPr>
-          <a:lstStyle/>
-          <a:p>
-            <a:pPr algn="ctr"/>
-            <a:r>
-              <a:rPr sz="2200" b="0" i="1">
-                <a:solidFill>
-                  <a:srgbClr val="8C8C8C"/>
+            <a:off x="640080" y="2985516"/>
+            <a:ext cx="10911535" cy="731520"/>
+          </a:xfrm>
+          <a:prstGeom prst="rect">
+            <a:avLst/>
+          </a:prstGeom>
+          <a:noFill/>
+        </p:spPr>
+        <p:txBody>
+          <a:bodyPr wrap="square">
+            <a:spAutoFit/>
+          </a:bodyPr>
+          <a:lstStyle/>
+          <a:p>
+            <a:pPr algn="ctr"/>
+            <a:r>
+              <a:rPr sz="3300" b="1" i="0">
+                <a:solidFill>
+                  <a:srgbClr val="FFFFFF"/>
+                </a:solidFill>
+                <a:latin typeface="Arial"/>
+              </a:rPr>
+              <a:t>Nenhum poder do inferno, nenhum plano do homem</a:t>
+            </a:r>
+          </a:p>
+        </p:txBody>
+      </p:sp>
+      <p:sp>
+        <p:nvSpPr>
+          <p:cNvPr id="4" name="TextBox 3"/>
+          <p:cNvSpPr txBox="1"/>
+          <p:nvPr/>
+        </p:nvSpPr>
+        <p:spPr>
+          <a:xfrm>
+            <a:off x="640080" y="4128516"/>
+            <a:ext cx="10911535" cy="310896"/>
+          </a:xfrm>
+          <a:prstGeom prst="rect">
+            <a:avLst/>
+          </a:prstGeom>
+          <a:noFill/>
+        </p:spPr>
+        <p:txBody>
+          <a:bodyPr wrap="square">
+            <a:spAutoFit/>
+          </a:bodyPr>
+          <a:lstStyle/>
+          <a:p>
+            <a:pPr algn="ctr"/>
+            <a:r>
+              <a:rPr sz="2000" b="0" i="0">
+                <a:solidFill>
+                  <a:srgbClr val="828282"/>
                 </a:solidFill>
                 <a:latin typeface="Arial"/>
               </a:rPr>
@@ -5466,66 +5291,31 @@
       </p:sp>
       <p:sp>
         <p:nvSpPr>
-          <p:cNvPr id="4" name="TextBox 3"/>
-          <p:cNvSpPr txBox="1"/>
-          <p:nvPr/>
-        </p:nvSpPr>
-        <p:spPr>
-          <a:xfrm>
-            <a:off x="594360" y="3529584"/>
-            <a:ext cx="11002975" cy="685800"/>
-          </a:xfrm>
-          <a:prstGeom prst="rect">
-            <a:avLst/>
-          </a:prstGeom>
-          <a:noFill/>
-        </p:spPr>
-        <p:txBody>
-          <a:bodyPr wrap="square">
-            <a:spAutoFit/>
-          </a:bodyPr>
-          <a:lstStyle/>
-          <a:p>
-            <a:pPr algn="ctr"/>
-            <a:r>
-              <a:rPr sz="3060" b="1" i="0">
-                <a:solidFill>
-                  <a:srgbClr val="FFFFFF"/>
-                </a:solidFill>
-                <a:latin typeface="Arial"/>
-              </a:rPr>
-              <a:t>Nenhum poder do inferno, nenhum plano do homem</a:t>
-            </a:r>
-          </a:p>
-        </p:txBody>
-      </p:sp>
-      <p:sp>
-        <p:nvSpPr>
           <p:cNvPr id="5" name="TextBox 4"/>
           <p:cNvSpPr txBox="1"/>
           <p:nvPr/>
         </p:nvSpPr>
         <p:spPr>
           <a:xfrm>
-            <a:off x="594360" y="4251960"/>
-            <a:ext cx="11002975" cy="347472"/>
-          </a:xfrm>
-          <a:prstGeom prst="rect">
-            <a:avLst/>
-          </a:prstGeom>
-          <a:noFill/>
-        </p:spPr>
-        <p:txBody>
-          <a:bodyPr wrap="square">
-            <a:spAutoFit/>
-          </a:bodyPr>
-          <a:lstStyle/>
-          <a:p>
-            <a:pPr algn="ctr"/>
-            <a:r>
-              <a:rPr sz="2200" b="0" i="1">
-                <a:solidFill>
-                  <a:srgbClr val="8C8C8C"/>
+            <a:off x="640080" y="4494276"/>
+            <a:ext cx="10911535" cy="310896"/>
+          </a:xfrm>
+          <a:prstGeom prst="rect">
+            <a:avLst/>
+          </a:prstGeom>
+          <a:noFill/>
+        </p:spPr>
+        <p:txBody>
+          <a:bodyPr wrap="square">
+            <a:spAutoFit/>
+          </a:bodyPr>
+          <a:lstStyle/>
+          <a:p>
+            <a:pPr algn="ctr"/>
+            <a:r>
+              <a:rPr sz="2000" b="0" i="0">
+                <a:solidFill>
+                  <a:srgbClr val="828282"/>
                 </a:solidFill>
                 <a:latin typeface="Arial"/>
               </a:rPr>
@@ -5568,23 +5358,23 @@
         </p:nvSpPr>
         <p:spPr>
           <a:xfrm>
-            <a:off x="594360" y="2258568"/>
-            <a:ext cx="11002975" cy="685800"/>
-          </a:xfrm>
-          <a:prstGeom prst="rect">
-            <a:avLst/>
-          </a:prstGeom>
-          <a:noFill/>
-        </p:spPr>
-        <p:txBody>
-          <a:bodyPr wrap="square">
-            <a:spAutoFit/>
-          </a:bodyPr>
-          <a:lstStyle/>
-          <a:p>
-            <a:pPr algn="ctr"/>
-            <a:r>
-              <a:rPr sz="3911" b="1" i="0">
+            <a:off x="640080" y="2052828"/>
+            <a:ext cx="10911535" cy="731520"/>
+          </a:xfrm>
+          <a:prstGeom prst="rect">
+            <a:avLst/>
+          </a:prstGeom>
+          <a:noFill/>
+        </p:spPr>
+        <p:txBody>
+          <a:bodyPr wrap="square">
+            <a:spAutoFit/>
+          </a:bodyPr>
+          <a:lstStyle/>
+          <a:p>
+            <a:pPr algn="ctr"/>
+            <a:r>
+              <a:rPr sz="4200" b="1" i="0">
                 <a:solidFill>
                   <a:srgbClr val="FFFFFF"/>
                 </a:solidFill>
@@ -5603,99 +5393,29 @@
         </p:nvSpPr>
         <p:spPr>
           <a:xfrm>
-            <a:off x="594360" y="2980944"/>
-            <a:ext cx="11002975" cy="347472"/>
-          </a:xfrm>
-          <a:prstGeom prst="rect">
-            <a:avLst/>
-          </a:prstGeom>
-          <a:noFill/>
-        </p:spPr>
-        <p:txBody>
-          <a:bodyPr wrap="square">
-            <a:spAutoFit/>
-          </a:bodyPr>
-          <a:lstStyle/>
-          <a:p>
-            <a:pPr algn="ctr"/>
-            <a:r>
-              <a:rPr sz="2200" b="0" i="1">
-                <a:solidFill>
-                  <a:srgbClr val="8C8C8C"/>
-                </a:solidFill>
-                <a:latin typeface="Arial"/>
-              </a:rPr>
-              <a:t/>
-            </a:r>
-          </a:p>
-        </p:txBody>
-      </p:sp>
-      <p:sp>
-        <p:nvSpPr>
-          <p:cNvPr id="4" name="TextBox 3"/>
-          <p:cNvSpPr txBox="1"/>
-          <p:nvPr/>
-        </p:nvSpPr>
-        <p:spPr>
-          <a:xfrm>
-            <a:off x="594360" y="3529584"/>
-            <a:ext cx="11002975" cy="685800"/>
-          </a:xfrm>
-          <a:prstGeom prst="rect">
-            <a:avLst/>
-          </a:prstGeom>
-          <a:noFill/>
-        </p:spPr>
-        <p:txBody>
-          <a:bodyPr wrap="square">
-            <a:spAutoFit/>
-          </a:bodyPr>
-          <a:lstStyle/>
-          <a:p>
-            <a:pPr algn="ctr"/>
-            <a:r>
-              <a:rPr sz="3805" b="1" i="0">
+            <a:off x="640080" y="2985516"/>
+            <a:ext cx="10911535" cy="731520"/>
+          </a:xfrm>
+          <a:prstGeom prst="rect">
+            <a:avLst/>
+          </a:prstGeom>
+          <a:noFill/>
+        </p:spPr>
+        <p:txBody>
+          <a:bodyPr wrap="square">
+            <a:spAutoFit/>
+          </a:bodyPr>
+          <a:lstStyle/>
+          <a:p>
+            <a:pPr algn="ctr"/>
+            <a:r>
+              <a:rPr sz="4100" b="1" i="0">
                 <a:solidFill>
                   <a:srgbClr val="FFFFFF"/>
                 </a:solidFill>
                 <a:latin typeface="Arial"/>
               </a:rPr>
               <a:t>Até Ele voltar ou me chamar para casa</a:t>
-            </a:r>
-          </a:p>
-        </p:txBody>
-      </p:sp>
-      <p:sp>
-        <p:nvSpPr>
-          <p:cNvPr id="5" name="TextBox 4"/>
-          <p:cNvSpPr txBox="1"/>
-          <p:nvPr/>
-        </p:nvSpPr>
-        <p:spPr>
-          <a:xfrm>
-            <a:off x="594360" y="4251960"/>
-            <a:ext cx="11002975" cy="347472"/>
-          </a:xfrm>
-          <a:prstGeom prst="rect">
-            <a:avLst/>
-          </a:prstGeom>
-          <a:noFill/>
-        </p:spPr>
-        <p:txBody>
-          <a:bodyPr wrap="square">
-            <a:spAutoFit/>
-          </a:bodyPr>
-          <a:lstStyle/>
-          <a:p>
-            <a:pPr algn="ctr"/>
-            <a:r>
-              <a:rPr sz="2200" b="0" i="1">
-                <a:solidFill>
-                  <a:srgbClr val="8C8C8C"/>
-                </a:solidFill>
-                <a:latin typeface="Arial"/>
-              </a:rPr>
-              <a:t/>
             </a:r>
           </a:p>
         </p:txBody>
@@ -5734,23 +5454,23 @@
         </p:nvSpPr>
         <p:spPr>
           <a:xfrm>
-            <a:off x="594360" y="2258568"/>
-            <a:ext cx="11002975" cy="685800"/>
-          </a:xfrm>
-          <a:prstGeom prst="rect">
-            <a:avLst/>
-          </a:prstGeom>
-          <a:noFill/>
-        </p:spPr>
-        <p:txBody>
-          <a:bodyPr wrap="square">
-            <a:spAutoFit/>
-          </a:bodyPr>
-          <a:lstStyle/>
-          <a:p>
-            <a:pPr algn="ctr"/>
-            <a:r>
-              <a:rPr sz="3705" b="1" i="0">
+            <a:off x="640080" y="2052828"/>
+            <a:ext cx="10911535" cy="731520"/>
+          </a:xfrm>
+          <a:prstGeom prst="rect">
+            <a:avLst/>
+          </a:prstGeom>
+          <a:noFill/>
+        </p:spPr>
+        <p:txBody>
+          <a:bodyPr wrap="square">
+            <a:spAutoFit/>
+          </a:bodyPr>
+          <a:lstStyle/>
+          <a:p>
+            <a:pPr algn="ctr"/>
+            <a:r>
+              <a:rPr sz="4000" b="1" i="0">
                 <a:solidFill>
                   <a:srgbClr val="FFFFFF"/>
                 </a:solidFill>
@@ -5769,99 +5489,29 @@
         </p:nvSpPr>
         <p:spPr>
           <a:xfrm>
-            <a:off x="594360" y="2980944"/>
-            <a:ext cx="11002975" cy="347472"/>
-          </a:xfrm>
-          <a:prstGeom prst="rect">
-            <a:avLst/>
-          </a:prstGeom>
-          <a:noFill/>
-        </p:spPr>
-        <p:txBody>
-          <a:bodyPr wrap="square">
-            <a:spAutoFit/>
-          </a:bodyPr>
-          <a:lstStyle/>
-          <a:p>
-            <a:pPr algn="ctr"/>
-            <a:r>
-              <a:rPr sz="2200" b="0" i="1">
-                <a:solidFill>
-                  <a:srgbClr val="8C8C8C"/>
-                </a:solidFill>
-                <a:latin typeface="Arial"/>
-              </a:rPr>
-              <a:t/>
-            </a:r>
-          </a:p>
-        </p:txBody>
-      </p:sp>
-      <p:sp>
-        <p:nvSpPr>
-          <p:cNvPr id="4" name="TextBox 3"/>
-          <p:cNvSpPr txBox="1"/>
-          <p:nvPr/>
-        </p:nvSpPr>
-        <p:spPr>
-          <a:xfrm>
-            <a:off x="594360" y="3529584"/>
-            <a:ext cx="11002975" cy="685800"/>
-          </a:xfrm>
-          <a:prstGeom prst="rect">
-            <a:avLst/>
-          </a:prstGeom>
-          <a:noFill/>
-        </p:spPr>
-        <p:txBody>
-          <a:bodyPr wrap="square">
-            <a:spAutoFit/>
-          </a:bodyPr>
-          <a:lstStyle/>
-          <a:p>
-            <a:pPr algn="ctr"/>
-            <a:r>
-              <a:rPr sz="4400" b="1" i="0">
+            <a:off x="640080" y="2985516"/>
+            <a:ext cx="10911535" cy="731520"/>
+          </a:xfrm>
+          <a:prstGeom prst="rect">
+            <a:avLst/>
+          </a:prstGeom>
+          <a:noFill/>
+        </p:spPr>
+        <p:txBody>
+          <a:bodyPr wrap="square">
+            <a:spAutoFit/>
+          </a:bodyPr>
+          <a:lstStyle/>
+          <a:p>
+            <a:pPr algn="ctr"/>
+            <a:r>
+              <a:rPr sz="4800" b="1" i="0">
                 <a:solidFill>
                   <a:srgbClr val="FFFFFF"/>
                 </a:solidFill>
                 <a:latin typeface="Arial"/>
               </a:rPr>
               <a:t>Este é o poder de Cristo em mim</a:t>
-            </a:r>
-          </a:p>
-        </p:txBody>
-      </p:sp>
-      <p:sp>
-        <p:nvSpPr>
-          <p:cNvPr id="5" name="TextBox 4"/>
-          <p:cNvSpPr txBox="1"/>
-          <p:nvPr/>
-        </p:nvSpPr>
-        <p:spPr>
-          <a:xfrm>
-            <a:off x="594360" y="4251960"/>
-            <a:ext cx="11002975" cy="347472"/>
-          </a:xfrm>
-          <a:prstGeom prst="rect">
-            <a:avLst/>
-          </a:prstGeom>
-          <a:noFill/>
-        </p:spPr>
-        <p:txBody>
-          <a:bodyPr wrap="square">
-            <a:spAutoFit/>
-          </a:bodyPr>
-          <a:lstStyle/>
-          <a:p>
-            <a:pPr algn="ctr"/>
-            <a:r>
-              <a:rPr sz="2200" b="0" i="1">
-                <a:solidFill>
-                  <a:srgbClr val="8C8C8C"/>
-                </a:solidFill>
-                <a:latin typeface="Arial"/>
-              </a:rPr>
-              <a:t/>
             </a:r>
           </a:p>
         </p:txBody>
@@ -5900,23 +5550,23 @@
         </p:nvSpPr>
         <p:spPr>
           <a:xfrm>
-            <a:off x="594360" y="1837944"/>
-            <a:ext cx="11002975" cy="685800"/>
-          </a:xfrm>
-          <a:prstGeom prst="rect">
-            <a:avLst/>
-          </a:prstGeom>
-          <a:noFill/>
-        </p:spPr>
-        <p:txBody>
-          <a:bodyPr wrap="square">
-            <a:spAutoFit/>
-          </a:bodyPr>
-          <a:lstStyle/>
-          <a:p>
-            <a:pPr algn="ctr"/>
-            <a:r>
-              <a:rPr sz="4400" b="1" i="0">
+            <a:off x="640080" y="1650492"/>
+            <a:ext cx="10911535" cy="731520"/>
+          </a:xfrm>
+          <a:prstGeom prst="rect">
+            <a:avLst/>
+          </a:prstGeom>
+          <a:noFill/>
+        </p:spPr>
+        <p:txBody>
+          <a:bodyPr wrap="square">
+            <a:spAutoFit/>
+          </a:bodyPr>
+          <a:lstStyle/>
+          <a:p>
+            <a:pPr algn="ctr"/>
+            <a:r>
+              <a:rPr sz="4800" b="1" i="0">
                 <a:solidFill>
                   <a:srgbClr val="FFFFFF"/>
                 </a:solidFill>
@@ -5935,25 +5585,25 @@
         </p:nvSpPr>
         <p:spPr>
           <a:xfrm>
-            <a:off x="594360" y="2560320"/>
-            <a:ext cx="11002975" cy="384048"/>
-          </a:xfrm>
-          <a:prstGeom prst="rect">
-            <a:avLst/>
-          </a:prstGeom>
-          <a:noFill/>
-        </p:spPr>
-        <p:txBody>
-          <a:bodyPr wrap="square">
-            <a:spAutoFit/>
-          </a:bodyPr>
-          <a:lstStyle/>
-          <a:p>
-            <a:pPr algn="ctr"/>
-            <a:r>
-              <a:rPr sz="2240" b="0" i="1">
-                <a:solidFill>
-                  <a:srgbClr val="B4B4B4"/>
+            <a:off x="640080" y="2418588"/>
+            <a:ext cx="10911535" cy="365760"/>
+          </a:xfrm>
+          <a:prstGeom prst="rect">
+            <a:avLst/>
+          </a:prstGeom>
+          <a:noFill/>
+        </p:spPr>
+        <p:txBody>
+          <a:bodyPr wrap="square">
+            <a:spAutoFit/>
+          </a:bodyPr>
+          <a:lstStyle/>
+          <a:p>
+            <a:pPr algn="ctr"/>
+            <a:r>
+              <a:rPr sz="2400" b="0" i="1">
+                <a:solidFill>
+                  <a:srgbClr val="AAAAAA"/>
                 </a:solidFill>
                 <a:latin typeface="Arial"/>
               </a:rPr>
@@ -5970,8 +5620,78 @@
         </p:nvSpPr>
         <p:spPr>
           <a:xfrm>
-            <a:off x="594360" y="2980944"/>
-            <a:ext cx="11002975" cy="347472"/>
+            <a:off x="640080" y="2985516"/>
+            <a:ext cx="10911535" cy="731520"/>
+          </a:xfrm>
+          <a:prstGeom prst="rect">
+            <a:avLst/>
+          </a:prstGeom>
+          <a:noFill/>
+        </p:spPr>
+        <p:txBody>
+          <a:bodyPr wrap="square">
+            <a:spAutoFit/>
+          </a:bodyPr>
+          <a:lstStyle/>
+          <a:p>
+            <a:pPr algn="ctr"/>
+            <a:r>
+              <a:rPr sz="4800" b="1" i="0">
+                <a:solidFill>
+                  <a:srgbClr val="FFFFFF"/>
+                </a:solidFill>
+                <a:latin typeface="Arial"/>
+              </a:rPr>
+              <a:t>我がうち  に住まう 主イエスの 力で</a:t>
+            </a:r>
+          </a:p>
+        </p:txBody>
+      </p:sp>
+      <p:sp>
+        <p:nvSpPr>
+          <p:cNvPr id="5" name="TextBox 4"/>
+          <p:cNvSpPr txBox="1"/>
+          <p:nvPr/>
+        </p:nvSpPr>
+        <p:spPr>
+          <a:xfrm>
+            <a:off x="640080" y="3753612"/>
+            <a:ext cx="10911535" cy="365760"/>
+          </a:xfrm>
+          <a:prstGeom prst="rect">
+            <a:avLst/>
+          </a:prstGeom>
+          <a:noFill/>
+        </p:spPr>
+        <p:txBody>
+          <a:bodyPr wrap="square">
+            <a:spAutoFit/>
+          </a:bodyPr>
+          <a:lstStyle/>
+          <a:p>
+            <a:pPr algn="ctr"/>
+            <a:r>
+              <a:rPr sz="2400" b="0" i="1">
+                <a:solidFill>
+                  <a:srgbClr val="AAAAAA"/>
+                </a:solidFill>
+                <a:latin typeface="Arial"/>
+              </a:rPr>
+              <a:t>waga uchi nisumau       shu yesuno chika rade</a:t>
+            </a:r>
+          </a:p>
+        </p:txBody>
+      </p:sp>
+      <p:sp>
+        <p:nvSpPr>
+          <p:cNvPr id="6" name="TextBox 5"/>
+          <p:cNvSpPr txBox="1"/>
+          <p:nvPr/>
+        </p:nvSpPr>
+        <p:spPr>
+          <a:xfrm>
+            <a:off x="640080" y="4530852"/>
+            <a:ext cx="10911535" cy="310896"/>
           </a:xfrm>
           <a:prstGeom prst="rect">
             <a:avLst/>
@@ -5988,7 +5708,7 @@
             <a:r>
               <a:rPr sz="2000" b="0" i="1">
                 <a:solidFill>
-                  <a:srgbClr val="8C8C8C"/>
+                  <a:srgbClr val="828282"/>
                 </a:solidFill>
                 <a:latin typeface="Arial"/>
               </a:rPr>
@@ -5999,84 +5719,14 @@
       </p:sp>
       <p:sp>
         <p:nvSpPr>
-          <p:cNvPr id="5" name="TextBox 4"/>
-          <p:cNvSpPr txBox="1"/>
-          <p:nvPr/>
-        </p:nvSpPr>
-        <p:spPr>
-          <a:xfrm>
-            <a:off x="594360" y="3529584"/>
-            <a:ext cx="11002975" cy="685800"/>
-          </a:xfrm>
-          <a:prstGeom prst="rect">
-            <a:avLst/>
-          </a:prstGeom>
-          <a:noFill/>
-        </p:spPr>
-        <p:txBody>
-          <a:bodyPr wrap="square">
-            <a:spAutoFit/>
-          </a:bodyPr>
-          <a:lstStyle/>
-          <a:p>
-            <a:pPr algn="ctr"/>
-            <a:r>
-              <a:rPr sz="4400" b="1" i="0">
-                <a:solidFill>
-                  <a:srgbClr val="FFFFFF"/>
-                </a:solidFill>
-                <a:latin typeface="Arial"/>
-              </a:rPr>
-              <a:t>我がうち  に住まう 主イエスの 力で</a:t>
-            </a:r>
-          </a:p>
-        </p:txBody>
-      </p:sp>
-      <p:sp>
-        <p:nvSpPr>
-          <p:cNvPr id="6" name="TextBox 5"/>
-          <p:cNvSpPr txBox="1"/>
-          <p:nvPr/>
-        </p:nvSpPr>
-        <p:spPr>
-          <a:xfrm>
-            <a:off x="594360" y="4251960"/>
-            <a:ext cx="11002975" cy="384048"/>
-          </a:xfrm>
-          <a:prstGeom prst="rect">
-            <a:avLst/>
-          </a:prstGeom>
-          <a:noFill/>
-        </p:spPr>
-        <p:txBody>
-          <a:bodyPr wrap="square">
-            <a:spAutoFit/>
-          </a:bodyPr>
-          <a:lstStyle/>
-          <a:p>
-            <a:pPr algn="ctr"/>
-            <a:r>
-              <a:rPr sz="2240" b="0" i="1">
-                <a:solidFill>
-                  <a:srgbClr val="B4B4B4"/>
-                </a:solidFill>
-                <a:latin typeface="Arial"/>
-              </a:rPr>
-              <a:t>waga uchi nisumau       shu yesuno chika rade</a:t>
-            </a:r>
-          </a:p>
-        </p:txBody>
-      </p:sp>
-      <p:sp>
-        <p:nvSpPr>
           <p:cNvPr id="7" name="TextBox 6"/>
           <p:cNvSpPr txBox="1"/>
           <p:nvPr/>
         </p:nvSpPr>
         <p:spPr>
           <a:xfrm>
-            <a:off x="594360" y="4672584"/>
-            <a:ext cx="11002975" cy="347472"/>
+            <a:off x="640080" y="4896612"/>
+            <a:ext cx="10911535" cy="310896"/>
           </a:xfrm>
           <a:prstGeom prst="rect">
             <a:avLst/>
@@ -6093,7 +5743,7 @@
             <a:r>
               <a:rPr sz="2000" b="0" i="1">
                 <a:solidFill>
-                  <a:srgbClr val="8C8C8C"/>
+                  <a:srgbClr val="828282"/>
                 </a:solidFill>
                 <a:latin typeface="Arial"/>
               </a:rPr>
@@ -6136,23 +5786,23 @@
         </p:nvSpPr>
         <p:spPr>
           <a:xfrm>
-            <a:off x="594360" y="1837944"/>
-            <a:ext cx="11002975" cy="685800"/>
-          </a:xfrm>
-          <a:prstGeom prst="rect">
-            <a:avLst/>
-          </a:prstGeom>
-          <a:noFill/>
-        </p:spPr>
-        <p:txBody>
-          <a:bodyPr wrap="square">
-            <a:spAutoFit/>
-          </a:bodyPr>
-          <a:lstStyle/>
-          <a:p>
-            <a:pPr algn="ctr"/>
-            <a:r>
-              <a:rPr sz="4400" b="1" i="0">
+            <a:off x="640080" y="1650492"/>
+            <a:ext cx="10911535" cy="731520"/>
+          </a:xfrm>
+          <a:prstGeom prst="rect">
+            <a:avLst/>
+          </a:prstGeom>
+          <a:noFill/>
+        </p:spPr>
+        <p:txBody>
+          <a:bodyPr wrap="square">
+            <a:spAutoFit/>
+          </a:bodyPr>
+          <a:lstStyle/>
+          <a:p>
+            <a:pPr algn="ctr"/>
+            <a:r>
+              <a:rPr sz="4800" b="1" i="0">
                 <a:solidFill>
                   <a:srgbClr val="FFFFFF"/>
                 </a:solidFill>
@@ -6171,8 +5821,8 @@
         </p:nvSpPr>
         <p:spPr>
           <a:xfrm>
-            <a:off x="594360" y="2560320"/>
-            <a:ext cx="11002975" cy="384048"/>
+            <a:off x="640080" y="2418588"/>
+            <a:ext cx="10911535" cy="365760"/>
           </a:xfrm>
           <a:prstGeom prst="rect">
             <a:avLst/>
@@ -6189,7 +5839,7 @@
             <a:r>
               <a:rPr sz="2400" b="0" i="1">
                 <a:solidFill>
-                  <a:srgbClr val="B4B4B4"/>
+                  <a:srgbClr val="AAAAAA"/>
                 </a:solidFill>
                 <a:latin typeface="Arial"/>
               </a:rPr>
@@ -6206,8 +5856,78 @@
         </p:nvSpPr>
         <p:spPr>
           <a:xfrm>
-            <a:off x="594360" y="2980944"/>
-            <a:ext cx="11002975" cy="347472"/>
+            <a:off x="640080" y="2985516"/>
+            <a:ext cx="10911535" cy="731520"/>
+          </a:xfrm>
+          <a:prstGeom prst="rect">
+            <a:avLst/>
+          </a:prstGeom>
+          <a:noFill/>
+        </p:spPr>
+        <p:txBody>
+          <a:bodyPr wrap="square">
+            <a:spAutoFit/>
+          </a:bodyPr>
+          <a:lstStyle/>
+          <a:p>
+            <a:pPr algn="ctr"/>
+            <a:r>
+              <a:rPr sz="4800" b="1" i="0">
+                <a:solidFill>
+                  <a:srgbClr val="FFFFFF"/>
+                </a:solidFill>
+                <a:latin typeface="Arial"/>
+              </a:rPr>
+              <a:t>御国に   いるまで 主の力に立つ</a:t>
+            </a:r>
+          </a:p>
+        </p:txBody>
+      </p:sp>
+      <p:sp>
+        <p:nvSpPr>
+          <p:cNvPr id="5" name="TextBox 4"/>
+          <p:cNvSpPr txBox="1"/>
+          <p:nvPr/>
+        </p:nvSpPr>
+        <p:spPr>
+          <a:xfrm>
+            <a:off x="640080" y="3753612"/>
+            <a:ext cx="10911535" cy="365760"/>
+          </a:xfrm>
+          <a:prstGeom prst="rect">
+            <a:avLst/>
+          </a:prstGeom>
+          <a:noFill/>
+        </p:spPr>
+        <p:txBody>
+          <a:bodyPr wrap="square">
+            <a:spAutoFit/>
+          </a:bodyPr>
+          <a:lstStyle/>
+          <a:p>
+            <a:pPr algn="ctr"/>
+            <a:r>
+              <a:rPr sz="2400" b="0" i="1">
+                <a:solidFill>
+                  <a:srgbClr val="AAAAAA"/>
+                </a:solidFill>
+                <a:latin typeface="Arial"/>
+              </a:rPr>
+              <a:t>miku nini irumade       shu nochika rani tatsu</a:t>
+            </a:r>
+          </a:p>
+        </p:txBody>
+      </p:sp>
+      <p:sp>
+        <p:nvSpPr>
+          <p:cNvPr id="6" name="TextBox 5"/>
+          <p:cNvSpPr txBox="1"/>
+          <p:nvPr/>
+        </p:nvSpPr>
+        <p:spPr>
+          <a:xfrm>
+            <a:off x="640080" y="4530852"/>
+            <a:ext cx="10911535" cy="310896"/>
           </a:xfrm>
           <a:prstGeom prst="rect">
             <a:avLst/>
@@ -6224,7 +5944,7 @@
             <a:r>
               <a:rPr sz="2000" b="0" i="1">
                 <a:solidFill>
-                  <a:srgbClr val="8C8C8C"/>
+                  <a:srgbClr val="828282"/>
                 </a:solidFill>
                 <a:latin typeface="Arial"/>
               </a:rPr>
@@ -6235,84 +5955,14 @@
       </p:sp>
       <p:sp>
         <p:nvSpPr>
-          <p:cNvPr id="5" name="TextBox 4"/>
-          <p:cNvSpPr txBox="1"/>
-          <p:nvPr/>
-        </p:nvSpPr>
-        <p:spPr>
-          <a:xfrm>
-            <a:off x="594360" y="3529584"/>
-            <a:ext cx="11002975" cy="685800"/>
-          </a:xfrm>
-          <a:prstGeom prst="rect">
-            <a:avLst/>
-          </a:prstGeom>
-          <a:noFill/>
-        </p:spPr>
-        <p:txBody>
-          <a:bodyPr wrap="square">
-            <a:spAutoFit/>
-          </a:bodyPr>
-          <a:lstStyle/>
-          <a:p>
-            <a:pPr algn="ctr"/>
-            <a:r>
-              <a:rPr sz="4400" b="1" i="0">
-                <a:solidFill>
-                  <a:srgbClr val="FFFFFF"/>
-                </a:solidFill>
-                <a:latin typeface="Arial"/>
-              </a:rPr>
-              <a:t>御国に   いるまで 主の力に立つ</a:t>
-            </a:r>
-          </a:p>
-        </p:txBody>
-      </p:sp>
-      <p:sp>
-        <p:nvSpPr>
-          <p:cNvPr id="6" name="TextBox 5"/>
-          <p:cNvSpPr txBox="1"/>
-          <p:nvPr/>
-        </p:nvSpPr>
-        <p:spPr>
-          <a:xfrm>
-            <a:off x="594360" y="4251960"/>
-            <a:ext cx="11002975" cy="384048"/>
-          </a:xfrm>
-          <a:prstGeom prst="rect">
-            <a:avLst/>
-          </a:prstGeom>
-          <a:noFill/>
-        </p:spPr>
-        <p:txBody>
-          <a:bodyPr wrap="square">
-            <a:spAutoFit/>
-          </a:bodyPr>
-          <a:lstStyle/>
-          <a:p>
-            <a:pPr algn="ctr"/>
-            <a:r>
-              <a:rPr sz="2191" b="0" i="1">
-                <a:solidFill>
-                  <a:srgbClr val="B4B4B4"/>
-                </a:solidFill>
-                <a:latin typeface="Arial"/>
-              </a:rPr>
-              <a:t>miku nini irumade       shu nochika rani tatsu</a:t>
-            </a:r>
-          </a:p>
-        </p:txBody>
-      </p:sp>
-      <p:sp>
-        <p:nvSpPr>
           <p:cNvPr id="7" name="TextBox 6"/>
           <p:cNvSpPr txBox="1"/>
           <p:nvPr/>
         </p:nvSpPr>
         <p:spPr>
           <a:xfrm>
-            <a:off x="594360" y="4672584"/>
-            <a:ext cx="11002975" cy="347472"/>
+            <a:off x="640080" y="4896612"/>
+            <a:ext cx="10911535" cy="310896"/>
           </a:xfrm>
           <a:prstGeom prst="rect">
             <a:avLst/>
@@ -6329,7 +5979,7 @@
             <a:r>
               <a:rPr sz="2000" b="0" i="1">
                 <a:solidFill>
-                  <a:srgbClr val="8C8C8C"/>
+                  <a:srgbClr val="828282"/>
                 </a:solidFill>
                 <a:latin typeface="Arial"/>
               </a:rPr>
@@ -6372,23 +6022,23 @@
         </p:nvSpPr>
         <p:spPr>
           <a:xfrm>
-            <a:off x="594360" y="1837944"/>
-            <a:ext cx="11002975" cy="685800"/>
-          </a:xfrm>
-          <a:prstGeom prst="rect">
-            <a:avLst/>
-          </a:prstGeom>
-          <a:noFill/>
-        </p:spPr>
-        <p:txBody>
-          <a:bodyPr wrap="square">
-            <a:spAutoFit/>
-          </a:bodyPr>
-          <a:lstStyle/>
-          <a:p>
-            <a:pPr algn="ctr"/>
-            <a:r>
-              <a:rPr sz="3200" b="1" i="0">
+            <a:off x="640080" y="1650492"/>
+            <a:ext cx="10911535" cy="731520"/>
+          </a:xfrm>
+          <a:prstGeom prst="rect">
+            <a:avLst/>
+          </a:prstGeom>
+          <a:noFill/>
+        </p:spPr>
+        <p:txBody>
+          <a:bodyPr wrap="square">
+            <a:spAutoFit/>
+          </a:bodyPr>
+          <a:lstStyle/>
+          <a:p>
+            <a:pPr algn="ctr"/>
+            <a:r>
+              <a:rPr sz="3400" b="1" i="0">
                 <a:solidFill>
                   <a:srgbClr val="FFFFFF"/>
                 </a:solidFill>
@@ -6407,8 +6057,8 @@
         </p:nvSpPr>
         <p:spPr>
           <a:xfrm>
-            <a:off x="594360" y="2560320"/>
-            <a:ext cx="11002975" cy="384048"/>
+            <a:off x="640080" y="2418588"/>
+            <a:ext cx="10911535" cy="365760"/>
           </a:xfrm>
           <a:prstGeom prst="rect">
             <a:avLst/>
@@ -6425,7 +6075,7 @@
             <a:r>
               <a:rPr sz="2400" b="0" i="1">
                 <a:solidFill>
-                  <a:srgbClr val="B4B4B4"/>
+                  <a:srgbClr val="AAAAAA"/>
                 </a:solidFill>
                 <a:latin typeface="Arial"/>
               </a:rPr>
@@ -6442,29 +6092,29 @@
         </p:nvSpPr>
         <p:spPr>
           <a:xfrm>
-            <a:off x="594360" y="2980944"/>
-            <a:ext cx="11002975" cy="347472"/>
-          </a:xfrm>
-          <a:prstGeom prst="rect">
-            <a:avLst/>
-          </a:prstGeom>
-          <a:noFill/>
-        </p:spPr>
-        <p:txBody>
-          <a:bodyPr wrap="square">
-            <a:spAutoFit/>
-          </a:bodyPr>
-          <a:lstStyle/>
-          <a:p>
-            <a:pPr algn="ctr"/>
-            <a:r>
-              <a:rPr sz="2000" b="0" i="1">
-                <a:solidFill>
-                  <a:srgbClr val="8C8C8C"/>
-                </a:solidFill>
-                <a:latin typeface="Arial"/>
-              </a:rPr>
-              <a:t/>
+            <a:off x="640080" y="2985516"/>
+            <a:ext cx="10911535" cy="731520"/>
+          </a:xfrm>
+          <a:prstGeom prst="rect">
+            <a:avLst/>
+          </a:prstGeom>
+          <a:noFill/>
+        </p:spPr>
+        <p:txBody>
+          <a:bodyPr wrap="square">
+            <a:spAutoFit/>
+          </a:bodyPr>
+          <a:lstStyle/>
+          <a:p>
+            <a:pPr algn="ctr"/>
+            <a:r>
+              <a:rPr sz="4600" b="1" i="0">
+                <a:solidFill>
+                  <a:srgbClr val="FFFFFF"/>
+                </a:solidFill>
+                <a:latin typeface="Arial"/>
+              </a:rPr>
+              <a:t>闇夜に    確かな     平安   主イエスに</a:t>
             </a:r>
           </a:p>
         </p:txBody>
@@ -6477,43 +6127,8 @@
         </p:nvSpPr>
         <p:spPr>
           <a:xfrm>
-            <a:off x="594360" y="3529584"/>
-            <a:ext cx="11002975" cy="685800"/>
-          </a:xfrm>
-          <a:prstGeom prst="rect">
-            <a:avLst/>
-          </a:prstGeom>
-          <a:noFill/>
-        </p:spPr>
-        <p:txBody>
-          <a:bodyPr wrap="square">
-            <a:spAutoFit/>
-          </a:bodyPr>
-          <a:lstStyle/>
-          <a:p>
-            <a:pPr algn="ctr"/>
-            <a:r>
-              <a:rPr sz="4223" b="1" i="0">
-                <a:solidFill>
-                  <a:srgbClr val="FFFFFF"/>
-                </a:solidFill>
-                <a:latin typeface="Arial"/>
-              </a:rPr>
-              <a:t>闇夜に    確かな     平安   主イエスに</a:t>
-            </a:r>
-          </a:p>
-        </p:txBody>
-      </p:sp>
-      <p:sp>
-        <p:nvSpPr>
-          <p:cNvPr id="6" name="TextBox 5"/>
-          <p:cNvSpPr txBox="1"/>
-          <p:nvPr/>
-        </p:nvSpPr>
-        <p:spPr>
-          <a:xfrm>
-            <a:off x="594360" y="4251960"/>
-            <a:ext cx="11002975" cy="384048"/>
+            <a:off x="640080" y="3753612"/>
+            <a:ext cx="10911535" cy="365760"/>
           </a:xfrm>
           <a:prstGeom prst="rect">
             <a:avLst/>
@@ -6530,46 +6145,11 @@
             <a:r>
               <a:rPr sz="2400" b="0" i="1">
                 <a:solidFill>
-                  <a:srgbClr val="B4B4B4"/>
+                  <a:srgbClr val="AAAAAA"/>
                 </a:solidFill>
                 <a:latin typeface="Arial"/>
               </a:rPr>
               <a:t>yamiyoni tashikana heian shu yesuni</a:t>
-            </a:r>
-          </a:p>
-        </p:txBody>
-      </p:sp>
-      <p:sp>
-        <p:nvSpPr>
-          <p:cNvPr id="7" name="TextBox 6"/>
-          <p:cNvSpPr txBox="1"/>
-          <p:nvPr/>
-        </p:nvSpPr>
-        <p:spPr>
-          <a:xfrm>
-            <a:off x="594360" y="4672584"/>
-            <a:ext cx="11002975" cy="347472"/>
-          </a:xfrm>
-          <a:prstGeom prst="rect">
-            <a:avLst/>
-          </a:prstGeom>
-          <a:noFill/>
-        </p:spPr>
-        <p:txBody>
-          <a:bodyPr wrap="square">
-            <a:spAutoFit/>
-          </a:bodyPr>
-          <a:lstStyle/>
-          <a:p>
-            <a:pPr algn="ctr"/>
-            <a:r>
-              <a:rPr sz="2000" b="0" i="1">
-                <a:solidFill>
-                  <a:srgbClr val="8C8C8C"/>
-                </a:solidFill>
-                <a:latin typeface="Arial"/>
-              </a:rPr>
-              <a:t/>
             </a:r>
           </a:p>
         </p:txBody>
@@ -6608,23 +6188,23 @@
         </p:nvSpPr>
         <p:spPr>
           <a:xfrm>
-            <a:off x="594360" y="1837944"/>
-            <a:ext cx="11002975" cy="685800"/>
-          </a:xfrm>
-          <a:prstGeom prst="rect">
-            <a:avLst/>
-          </a:prstGeom>
-          <a:noFill/>
-        </p:spPr>
-        <p:txBody>
-          <a:bodyPr wrap="square">
-            <a:spAutoFit/>
-          </a:bodyPr>
-          <a:lstStyle/>
-          <a:p>
-            <a:pPr algn="ctr"/>
-            <a:r>
-              <a:rPr sz="3911" b="1" i="0">
+            <a:off x="640080" y="1650492"/>
+            <a:ext cx="10911535" cy="731520"/>
+          </a:xfrm>
+          <a:prstGeom prst="rect">
+            <a:avLst/>
+          </a:prstGeom>
+          <a:noFill/>
+        </p:spPr>
+        <p:txBody>
+          <a:bodyPr wrap="square">
+            <a:spAutoFit/>
+          </a:bodyPr>
+          <a:lstStyle/>
+          <a:p>
+            <a:pPr algn="ctr"/>
+            <a:r>
+              <a:rPr sz="4200" b="1" i="0">
                 <a:solidFill>
                   <a:srgbClr val="FFFFFF"/>
                 </a:solidFill>
@@ -6643,8 +6223,8 @@
         </p:nvSpPr>
         <p:spPr>
           <a:xfrm>
-            <a:off x="594360" y="2560320"/>
-            <a:ext cx="11002975" cy="384048"/>
+            <a:off x="640080" y="2418588"/>
+            <a:ext cx="10911535" cy="365760"/>
           </a:xfrm>
           <a:prstGeom prst="rect">
             <a:avLst/>
@@ -6661,7 +6241,7 @@
             <a:r>
               <a:rPr sz="2400" b="0" i="1">
                 <a:solidFill>
-                  <a:srgbClr val="B4B4B4"/>
+                  <a:srgbClr val="AAAAAA"/>
                 </a:solidFill>
                 <a:latin typeface="Arial"/>
               </a:rPr>
@@ -6678,29 +6258,29 @@
         </p:nvSpPr>
         <p:spPr>
           <a:xfrm>
-            <a:off x="594360" y="2980944"/>
-            <a:ext cx="11002975" cy="347472"/>
-          </a:xfrm>
-          <a:prstGeom prst="rect">
-            <a:avLst/>
-          </a:prstGeom>
-          <a:noFill/>
-        </p:spPr>
-        <p:txBody>
-          <a:bodyPr wrap="square">
-            <a:spAutoFit/>
-          </a:bodyPr>
-          <a:lstStyle/>
-          <a:p>
-            <a:pPr algn="ctr"/>
-            <a:r>
-              <a:rPr sz="2000" b="0" i="1">
-                <a:solidFill>
-                  <a:srgbClr val="8C8C8C"/>
-                </a:solidFill>
-                <a:latin typeface="Arial"/>
-              </a:rPr>
-              <a:t/>
+            <a:off x="640080" y="2985516"/>
+            <a:ext cx="10911535" cy="731520"/>
+          </a:xfrm>
+          <a:prstGeom prst="rect">
+            <a:avLst/>
+          </a:prstGeom>
+          <a:noFill/>
+        </p:spPr>
+        <p:txBody>
+          <a:bodyPr wrap="square">
+            <a:spAutoFit/>
+          </a:bodyPr>
+          <a:lstStyle/>
+          <a:p>
+            <a:pPr algn="ctr"/>
+            <a:r>
+              <a:rPr sz="4800" b="1" i="0">
+                <a:solidFill>
+                  <a:srgbClr val="FFFFFF"/>
+                </a:solidFill>
+                <a:latin typeface="Arial"/>
+              </a:rPr>
+              <a:t>王の王 宇宙の     全てが   讃える</a:t>
             </a:r>
           </a:p>
         </p:txBody>
@@ -6713,43 +6293,8 @@
         </p:nvSpPr>
         <p:spPr>
           <a:xfrm>
-            <a:off x="594360" y="3529584"/>
-            <a:ext cx="11002975" cy="685800"/>
-          </a:xfrm>
-          <a:prstGeom prst="rect">
-            <a:avLst/>
-          </a:prstGeom>
-          <a:noFill/>
-        </p:spPr>
-        <p:txBody>
-          <a:bodyPr wrap="square">
-            <a:spAutoFit/>
-          </a:bodyPr>
-          <a:lstStyle/>
-          <a:p>
-            <a:pPr algn="ctr"/>
-            <a:r>
-              <a:rPr sz="4400" b="1" i="0">
-                <a:solidFill>
-                  <a:srgbClr val="FFFFFF"/>
-                </a:solidFill>
-                <a:latin typeface="Arial"/>
-              </a:rPr>
-              <a:t>王の王 宇宙の     全てが   讃える</a:t>
-            </a:r>
-          </a:p>
-        </p:txBody>
-      </p:sp>
-      <p:sp>
-        <p:nvSpPr>
-          <p:cNvPr id="6" name="TextBox 5"/>
-          <p:cNvSpPr txBox="1"/>
-          <p:nvPr/>
-        </p:nvSpPr>
-        <p:spPr>
-          <a:xfrm>
-            <a:off x="594360" y="4251960"/>
-            <a:ext cx="11002975" cy="384048"/>
+            <a:off x="640080" y="3753612"/>
+            <a:ext cx="10911535" cy="365760"/>
           </a:xfrm>
           <a:prstGeom prst="rect">
             <a:avLst/>
@@ -6766,46 +6311,11 @@
             <a:r>
               <a:rPr sz="2400" b="0" i="1">
                 <a:solidFill>
-                  <a:srgbClr val="B4B4B4"/>
+                  <a:srgbClr val="AAAAAA"/>
                 </a:solidFill>
                 <a:latin typeface="Arial"/>
               </a:rPr>
               <a:t>o-no-o uchuuno subetega ta taeru</a:t>
-            </a:r>
-          </a:p>
-        </p:txBody>
-      </p:sp>
-      <p:sp>
-        <p:nvSpPr>
-          <p:cNvPr id="7" name="TextBox 6"/>
-          <p:cNvSpPr txBox="1"/>
-          <p:nvPr/>
-        </p:nvSpPr>
-        <p:spPr>
-          <a:xfrm>
-            <a:off x="594360" y="4672584"/>
-            <a:ext cx="11002975" cy="347472"/>
-          </a:xfrm>
-          <a:prstGeom prst="rect">
-            <a:avLst/>
-          </a:prstGeom>
-          <a:noFill/>
-        </p:spPr>
-        <p:txBody>
-          <a:bodyPr wrap="square">
-            <a:spAutoFit/>
-          </a:bodyPr>
-          <a:lstStyle/>
-          <a:p>
-            <a:pPr algn="ctr"/>
-            <a:r>
-              <a:rPr sz="2000" b="0" i="1">
-                <a:solidFill>
-                  <a:srgbClr val="8C8C8C"/>
-                </a:solidFill>
-                <a:latin typeface="Arial"/>
-              </a:rPr>
-              <a:t/>
             </a:r>
           </a:p>
         </p:txBody>
@@ -6844,23 +6354,23 @@
         </p:nvSpPr>
         <p:spPr>
           <a:xfrm>
-            <a:off x="594360" y="2683764"/>
-            <a:ext cx="11002975" cy="685800"/>
-          </a:xfrm>
-          <a:prstGeom prst="rect">
-            <a:avLst/>
-          </a:prstGeom>
-          <a:noFill/>
-        </p:spPr>
-        <p:txBody>
-          <a:bodyPr wrap="square">
-            <a:spAutoFit/>
-          </a:bodyPr>
-          <a:lstStyle/>
-          <a:p>
-            <a:pPr algn="ctr"/>
-            <a:r>
-              <a:rPr sz="4400" b="1" i="0">
+            <a:off x="640080" y="2500884"/>
+            <a:ext cx="10911535" cy="731520"/>
+          </a:xfrm>
+          <a:prstGeom prst="rect">
+            <a:avLst/>
+          </a:prstGeom>
+          <a:noFill/>
+        </p:spPr>
+        <p:txBody>
+          <a:bodyPr wrap="square">
+            <a:spAutoFit/>
+          </a:bodyPr>
+          <a:lstStyle/>
+          <a:p>
+            <a:pPr algn="ctr"/>
+            <a:r>
+              <a:rPr sz="4800" b="1" i="0">
                 <a:solidFill>
                   <a:srgbClr val="FFFFFF"/>
                 </a:solidFill>
@@ -6879,8 +6389,8 @@
         </p:nvSpPr>
         <p:spPr>
           <a:xfrm>
-            <a:off x="594360" y="3406140"/>
-            <a:ext cx="11002975" cy="384048"/>
+            <a:off x="640080" y="3268980"/>
+            <a:ext cx="10911535" cy="365760"/>
           </a:xfrm>
           <a:prstGeom prst="rect">
             <a:avLst/>
@@ -6897,46 +6407,11 @@
             <a:r>
               <a:rPr sz="2400" b="0" i="1">
                 <a:solidFill>
-                  <a:srgbClr val="B4B4B4"/>
+                  <a:srgbClr val="AAAAAA"/>
                 </a:solidFill>
                 <a:latin typeface="Arial"/>
               </a:rPr>
               <a:t>tataeru           tataeru</a:t>
-            </a:r>
-          </a:p>
-        </p:txBody>
-      </p:sp>
-      <p:sp>
-        <p:nvSpPr>
-          <p:cNvPr id="4" name="TextBox 3"/>
-          <p:cNvSpPr txBox="1"/>
-          <p:nvPr/>
-        </p:nvSpPr>
-        <p:spPr>
-          <a:xfrm>
-            <a:off x="594360" y="3826764"/>
-            <a:ext cx="11002975" cy="347472"/>
-          </a:xfrm>
-          <a:prstGeom prst="rect">
-            <a:avLst/>
-          </a:prstGeom>
-          <a:noFill/>
-        </p:spPr>
-        <p:txBody>
-          <a:bodyPr wrap="square">
-            <a:spAutoFit/>
-          </a:bodyPr>
-          <a:lstStyle/>
-          <a:p>
-            <a:pPr algn="ctr"/>
-            <a:r>
-              <a:rPr sz="2000" b="0" i="1">
-                <a:solidFill>
-                  <a:srgbClr val="8C8C8C"/>
-                </a:solidFill>
-                <a:latin typeface="Arial"/>
-              </a:rPr>
-              <a:t/>
             </a:r>
           </a:p>
         </p:txBody>
@@ -6975,23 +6450,23 @@
         </p:nvSpPr>
         <p:spPr>
           <a:xfrm>
-            <a:off x="594360" y="2258568"/>
-            <a:ext cx="11002975" cy="685800"/>
-          </a:xfrm>
-          <a:prstGeom prst="rect">
-            <a:avLst/>
-          </a:prstGeom>
-          <a:noFill/>
-        </p:spPr>
-        <p:txBody>
-          <a:bodyPr wrap="square">
-            <a:spAutoFit/>
-          </a:bodyPr>
-          <a:lstStyle/>
-          <a:p>
-            <a:pPr algn="ctr"/>
-            <a:r>
-              <a:rPr sz="3060" b="1" i="0">
+            <a:off x="640080" y="2052828"/>
+            <a:ext cx="10911535" cy="731520"/>
+          </a:xfrm>
+          <a:prstGeom prst="rect">
+            <a:avLst/>
+          </a:prstGeom>
+          <a:noFill/>
+        </p:spPr>
+        <p:txBody>
+          <a:bodyPr wrap="square">
+            <a:spAutoFit/>
+          </a:bodyPr>
+          <a:lstStyle/>
+          <a:p>
+            <a:pPr algn="ctr"/>
+            <a:r>
+              <a:rPr sz="3300" b="1" i="0">
                 <a:solidFill>
                   <a:srgbClr val="FFFFFF"/>
                 </a:solidFill>
@@ -7010,99 +6485,29 @@
         </p:nvSpPr>
         <p:spPr>
           <a:xfrm>
-            <a:off x="594360" y="2980944"/>
-            <a:ext cx="11002975" cy="347472"/>
-          </a:xfrm>
-          <a:prstGeom prst="rect">
-            <a:avLst/>
-          </a:prstGeom>
-          <a:noFill/>
-        </p:spPr>
-        <p:txBody>
-          <a:bodyPr wrap="square">
-            <a:spAutoFit/>
-          </a:bodyPr>
-          <a:lstStyle/>
-          <a:p>
-            <a:pPr algn="ctr"/>
-            <a:r>
-              <a:rPr sz="2200" b="0" i="1">
-                <a:solidFill>
-                  <a:srgbClr val="8C8C8C"/>
-                </a:solidFill>
-                <a:latin typeface="Arial"/>
-              </a:rPr>
-              <a:t/>
-            </a:r>
-          </a:p>
-        </p:txBody>
-      </p:sp>
-      <p:sp>
-        <p:nvSpPr>
-          <p:cNvPr id="4" name="TextBox 3"/>
-          <p:cNvSpPr txBox="1"/>
-          <p:nvPr/>
-        </p:nvSpPr>
-        <p:spPr>
-          <a:xfrm>
-            <a:off x="594360" y="3529584"/>
-            <a:ext cx="11002975" cy="685800"/>
-          </a:xfrm>
-          <a:prstGeom prst="rect">
-            <a:avLst/>
-          </a:prstGeom>
-          <a:noFill/>
-        </p:spPr>
-        <p:txBody>
-          <a:bodyPr wrap="square">
-            <a:spAutoFit/>
-          </a:bodyPr>
-          <a:lstStyle/>
-          <a:p>
-            <a:pPr algn="ctr"/>
-            <a:r>
-              <a:rPr sz="3274" b="1" i="0">
+            <a:off x="640080" y="2985516"/>
+            <a:ext cx="10911535" cy="731520"/>
+          </a:xfrm>
+          <a:prstGeom prst="rect">
+            <a:avLst/>
+          </a:prstGeom>
+          <a:noFill/>
+        </p:spPr>
+        <p:txBody>
+          <a:bodyPr wrap="square">
+            <a:spAutoFit/>
+          </a:bodyPr>
+          <a:lstStyle/>
+          <a:p>
+            <a:pPr algn="ctr"/>
+            <a:r>
+              <a:rPr sz="3500" b="1" i="0">
                 <a:solidFill>
                   <a:srgbClr val="FFFFFF"/>
                 </a:solidFill>
                 <a:latin typeface="Arial"/>
               </a:rPr>
               <a:t>Que alturas de amor, que profundezas de paz</a:t>
-            </a:r>
-          </a:p>
-        </p:txBody>
-      </p:sp>
-      <p:sp>
-        <p:nvSpPr>
-          <p:cNvPr id="5" name="TextBox 4"/>
-          <p:cNvSpPr txBox="1"/>
-          <p:nvPr/>
-        </p:nvSpPr>
-        <p:spPr>
-          <a:xfrm>
-            <a:off x="594360" y="4251960"/>
-            <a:ext cx="11002975" cy="347472"/>
-          </a:xfrm>
-          <a:prstGeom prst="rect">
-            <a:avLst/>
-          </a:prstGeom>
-          <a:noFill/>
-        </p:spPr>
-        <p:txBody>
-          <a:bodyPr wrap="square">
-            <a:spAutoFit/>
-          </a:bodyPr>
-          <a:lstStyle/>
-          <a:p>
-            <a:pPr algn="ctr"/>
-            <a:r>
-              <a:rPr sz="2200" b="0" i="1">
-                <a:solidFill>
-                  <a:srgbClr val="8C8C8C"/>
-                </a:solidFill>
-                <a:latin typeface="Arial"/>
-              </a:rPr>
-              <a:t/>
             </a:r>
           </a:p>
         </p:txBody>
@@ -7141,23 +6546,23 @@
         </p:nvSpPr>
         <p:spPr>
           <a:xfrm>
-            <a:off x="594360" y="2258568"/>
-            <a:ext cx="11002975" cy="685800"/>
-          </a:xfrm>
-          <a:prstGeom prst="rect">
-            <a:avLst/>
-          </a:prstGeom>
-          <a:noFill/>
-        </p:spPr>
-        <p:txBody>
-          <a:bodyPr wrap="square">
-            <a:spAutoFit/>
-          </a:bodyPr>
-          <a:lstStyle/>
-          <a:p>
-            <a:pPr algn="ctr"/>
-            <a:r>
-              <a:rPr sz="2995" b="1" i="0">
+            <a:off x="640080" y="2052828"/>
+            <a:ext cx="10911535" cy="731520"/>
+          </a:xfrm>
+          <a:prstGeom prst="rect">
+            <a:avLst/>
+          </a:prstGeom>
+          <a:noFill/>
+        </p:spPr>
+        <p:txBody>
+          <a:bodyPr wrap="square">
+            <a:spAutoFit/>
+          </a:bodyPr>
+          <a:lstStyle/>
+          <a:p>
+            <a:pPr algn="ctr"/>
+            <a:r>
+              <a:rPr sz="3200" b="1" i="0">
                 <a:solidFill>
                   <a:srgbClr val="FFFFFF"/>
                 </a:solidFill>
@@ -7176,99 +6581,29 @@
         </p:nvSpPr>
         <p:spPr>
           <a:xfrm>
-            <a:off x="594360" y="2980944"/>
-            <a:ext cx="11002975" cy="347472"/>
-          </a:xfrm>
-          <a:prstGeom prst="rect">
-            <a:avLst/>
-          </a:prstGeom>
-          <a:noFill/>
-        </p:spPr>
-        <p:txBody>
-          <a:bodyPr wrap="square">
-            <a:spAutoFit/>
-          </a:bodyPr>
-          <a:lstStyle/>
-          <a:p>
-            <a:pPr algn="ctr"/>
-            <a:r>
-              <a:rPr sz="2200" b="0" i="1">
-                <a:solidFill>
-                  <a:srgbClr val="8C8C8C"/>
-                </a:solidFill>
-                <a:latin typeface="Arial"/>
-              </a:rPr>
-              <a:t/>
-            </a:r>
-          </a:p>
-        </p:txBody>
-      </p:sp>
-      <p:sp>
-        <p:nvSpPr>
-          <p:cNvPr id="4" name="TextBox 3"/>
-          <p:cNvSpPr txBox="1"/>
-          <p:nvPr/>
-        </p:nvSpPr>
-        <p:spPr>
-          <a:xfrm>
-            <a:off x="594360" y="3529584"/>
-            <a:ext cx="11002975" cy="685800"/>
-          </a:xfrm>
-          <a:prstGeom prst="rect">
-            <a:avLst/>
-          </a:prstGeom>
-          <a:noFill/>
-        </p:spPr>
-        <p:txBody>
-          <a:bodyPr wrap="square">
-            <a:spAutoFit/>
-          </a:bodyPr>
-          <a:lstStyle/>
-          <a:p>
-            <a:pPr algn="ctr"/>
-            <a:r>
-              <a:rPr sz="4400" b="1" i="0">
+            <a:off x="640080" y="2985516"/>
+            <a:ext cx="10911535" cy="731520"/>
+          </a:xfrm>
+          <a:prstGeom prst="rect">
+            <a:avLst/>
+          </a:prstGeom>
+          <a:noFill/>
+        </p:spPr>
+        <p:txBody>
+          <a:bodyPr wrap="square">
+            <a:spAutoFit/>
+          </a:bodyPr>
+          <a:lstStyle/>
+          <a:p>
+            <a:pPr algn="ctr"/>
+            <a:r>
+              <a:rPr sz="4800" b="1" i="0">
                 <a:solidFill>
                   <a:srgbClr val="FFFFFF"/>
                 </a:solidFill>
                 <a:latin typeface="Arial"/>
               </a:rPr>
               <a:t>Meu Consolador, meu Tudo em tudo</a:t>
-            </a:r>
-          </a:p>
-        </p:txBody>
-      </p:sp>
-      <p:sp>
-        <p:nvSpPr>
-          <p:cNvPr id="5" name="TextBox 4"/>
-          <p:cNvSpPr txBox="1"/>
-          <p:nvPr/>
-        </p:nvSpPr>
-        <p:spPr>
-          <a:xfrm>
-            <a:off x="594360" y="4251960"/>
-            <a:ext cx="11002975" cy="347472"/>
-          </a:xfrm>
-          <a:prstGeom prst="rect">
-            <a:avLst/>
-          </a:prstGeom>
-          <a:noFill/>
-        </p:spPr>
-        <p:txBody>
-          <a:bodyPr wrap="square">
-            <a:spAutoFit/>
-          </a:bodyPr>
-          <a:lstStyle/>
-          <a:p>
-            <a:pPr algn="ctr"/>
-            <a:r>
-              <a:rPr sz="2200" b="0" i="1">
-                <a:solidFill>
-                  <a:srgbClr val="8C8C8C"/>
-                </a:solidFill>
-                <a:latin typeface="Arial"/>
-              </a:rPr>
-              <a:t/>
             </a:r>
           </a:p>
         </p:txBody>
@@ -7307,23 +6642,23 @@
         </p:nvSpPr>
         <p:spPr>
           <a:xfrm>
-            <a:off x="594360" y="1837944"/>
-            <a:ext cx="11002975" cy="685800"/>
-          </a:xfrm>
-          <a:prstGeom prst="rect">
-            <a:avLst/>
-          </a:prstGeom>
-          <a:noFill/>
-        </p:spPr>
-        <p:txBody>
-          <a:bodyPr wrap="square">
-            <a:spAutoFit/>
-          </a:bodyPr>
-          <a:lstStyle/>
-          <a:p>
-            <a:pPr algn="ctr"/>
-            <a:r>
-              <a:rPr sz="4400" b="1" i="0">
+            <a:off x="640080" y="1650492"/>
+            <a:ext cx="10911535" cy="731520"/>
+          </a:xfrm>
+          <a:prstGeom prst="rect">
+            <a:avLst/>
+          </a:prstGeom>
+          <a:noFill/>
+        </p:spPr>
+        <p:txBody>
+          <a:bodyPr wrap="square">
+            <a:spAutoFit/>
+          </a:bodyPr>
+          <a:lstStyle/>
+          <a:p>
+            <a:pPr algn="ctr"/>
+            <a:r>
+              <a:rPr sz="4800" b="1" i="0">
                 <a:solidFill>
                   <a:srgbClr val="FFFFFF"/>
                 </a:solidFill>
@@ -7342,8 +6677,8 @@
         </p:nvSpPr>
         <p:spPr>
           <a:xfrm>
-            <a:off x="594360" y="2560320"/>
-            <a:ext cx="11002975" cy="384048"/>
+            <a:off x="640080" y="2418588"/>
+            <a:ext cx="10911535" cy="365760"/>
           </a:xfrm>
           <a:prstGeom prst="rect">
             <a:avLst/>
@@ -7360,7 +6695,7 @@
             <a:r>
               <a:rPr sz="2400" b="0" i="1">
                 <a:solidFill>
-                  <a:srgbClr val="B4B4B4"/>
+                  <a:srgbClr val="AAAAAA"/>
                 </a:solidFill>
                 <a:latin typeface="Arial"/>
               </a:rPr>
@@ -7377,8 +6712,78 @@
         </p:nvSpPr>
         <p:spPr>
           <a:xfrm>
-            <a:off x="594360" y="2980944"/>
-            <a:ext cx="11002975" cy="347472"/>
+            <a:off x="640080" y="2985516"/>
+            <a:ext cx="10911535" cy="731520"/>
+          </a:xfrm>
+          <a:prstGeom prst="rect">
+            <a:avLst/>
+          </a:prstGeom>
+          <a:noFill/>
+        </p:spPr>
+        <p:txBody>
+          <a:bodyPr wrap="square">
+            <a:spAutoFit/>
+          </a:bodyPr>
+          <a:lstStyle/>
+          <a:p>
+            <a:pPr algn="ctr"/>
+            <a:r>
+              <a:rPr sz="4800" b="1" i="0">
+                <a:solidFill>
+                  <a:srgbClr val="FFFFFF"/>
+                </a:solidFill>
+                <a:latin typeface="Arial"/>
+              </a:rPr>
+              <a:t>ゆるがぬ  いしずえ まことの  光よ</a:t>
+            </a:r>
+          </a:p>
+        </p:txBody>
+      </p:sp>
+      <p:sp>
+        <p:nvSpPr>
+          <p:cNvPr id="5" name="TextBox 4"/>
+          <p:cNvSpPr txBox="1"/>
+          <p:nvPr/>
+        </p:nvSpPr>
+        <p:spPr>
+          <a:xfrm>
+            <a:off x="640080" y="3753612"/>
+            <a:ext cx="10911535" cy="365760"/>
+          </a:xfrm>
+          <a:prstGeom prst="rect">
+            <a:avLst/>
+          </a:prstGeom>
+          <a:noFill/>
+        </p:spPr>
+        <p:txBody>
+          <a:bodyPr wrap="square">
+            <a:spAutoFit/>
+          </a:bodyPr>
+          <a:lstStyle/>
+          <a:p>
+            <a:pPr algn="ctr"/>
+            <a:r>
+              <a:rPr sz="2400" b="0" i="1">
+                <a:solidFill>
+                  <a:srgbClr val="AAAAAA"/>
+                </a:solidFill>
+                <a:latin typeface="Arial"/>
+              </a:rPr>
+              <a:t>yuruganu ishizue          ma kotono hika riyo</a:t>
+            </a:r>
+          </a:p>
+        </p:txBody>
+      </p:sp>
+      <p:sp>
+        <p:nvSpPr>
+          <p:cNvPr id="6" name="TextBox 5"/>
+          <p:cNvSpPr txBox="1"/>
+          <p:nvPr/>
+        </p:nvSpPr>
+        <p:spPr>
+          <a:xfrm>
+            <a:off x="640080" y="4530852"/>
+            <a:ext cx="10911535" cy="310896"/>
           </a:xfrm>
           <a:prstGeom prst="rect">
             <a:avLst/>
@@ -7395,7 +6800,7 @@
             <a:r>
               <a:rPr sz="2000" b="0" i="1">
                 <a:solidFill>
-                  <a:srgbClr val="8C8C8C"/>
+                  <a:srgbClr val="828282"/>
                 </a:solidFill>
                 <a:latin typeface="Arial"/>
               </a:rPr>
@@ -7406,84 +6811,14 @@
       </p:sp>
       <p:sp>
         <p:nvSpPr>
-          <p:cNvPr id="5" name="TextBox 4"/>
-          <p:cNvSpPr txBox="1"/>
-          <p:nvPr/>
-        </p:nvSpPr>
-        <p:spPr>
-          <a:xfrm>
-            <a:off x="594360" y="3529584"/>
-            <a:ext cx="11002975" cy="685800"/>
-          </a:xfrm>
-          <a:prstGeom prst="rect">
-            <a:avLst/>
-          </a:prstGeom>
-          <a:noFill/>
-        </p:spPr>
-        <p:txBody>
-          <a:bodyPr wrap="square">
-            <a:spAutoFit/>
-          </a:bodyPr>
-          <a:lstStyle/>
-          <a:p>
-            <a:pPr algn="ctr"/>
-            <a:r>
-              <a:rPr sz="4400" b="1" i="0">
-                <a:solidFill>
-                  <a:srgbClr val="FFFFFF"/>
-                </a:solidFill>
-                <a:latin typeface="Arial"/>
-              </a:rPr>
-              <a:t>ゆるがぬ  いしずえ まことの  光よ</a:t>
-            </a:r>
-          </a:p>
-        </p:txBody>
-      </p:sp>
-      <p:sp>
-        <p:nvSpPr>
-          <p:cNvPr id="6" name="TextBox 5"/>
-          <p:cNvSpPr txBox="1"/>
-          <p:nvPr/>
-        </p:nvSpPr>
-        <p:spPr>
-          <a:xfrm>
-            <a:off x="594360" y="4251960"/>
-            <a:ext cx="11002975" cy="384048"/>
-          </a:xfrm>
-          <a:prstGeom prst="rect">
-            <a:avLst/>
-          </a:prstGeom>
-          <a:noFill/>
-        </p:spPr>
-        <p:txBody>
-          <a:bodyPr wrap="square">
-            <a:spAutoFit/>
-          </a:bodyPr>
-          <a:lstStyle/>
-          <a:p>
-            <a:pPr algn="ctr"/>
-            <a:r>
-              <a:rPr sz="2240" b="0" i="1">
-                <a:solidFill>
-                  <a:srgbClr val="B4B4B4"/>
-                </a:solidFill>
-                <a:latin typeface="Arial"/>
-              </a:rPr>
-              <a:t>yuruganu ishizue          ma kotono hika riyo</a:t>
-            </a:r>
-          </a:p>
-        </p:txBody>
-      </p:sp>
-      <p:sp>
-        <p:nvSpPr>
           <p:cNvPr id="7" name="TextBox 6"/>
           <p:cNvSpPr txBox="1"/>
           <p:nvPr/>
         </p:nvSpPr>
         <p:spPr>
           <a:xfrm>
-            <a:off x="594360" y="4672584"/>
-            <a:ext cx="11002975" cy="347472"/>
+            <a:off x="640080" y="4896612"/>
+            <a:ext cx="10911535" cy="310896"/>
           </a:xfrm>
           <a:prstGeom prst="rect">
             <a:avLst/>
@@ -7500,7 +6835,7 @@
             <a:r>
               <a:rPr sz="2000" b="0" i="1">
                 <a:solidFill>
-                  <a:srgbClr val="8C8C8C"/>
+                  <a:srgbClr val="828282"/>
                 </a:solidFill>
                 <a:latin typeface="Arial"/>
               </a:rPr>
@@ -7543,23 +6878,23 @@
         </p:nvSpPr>
         <p:spPr>
           <a:xfrm>
-            <a:off x="594360" y="1837944"/>
-            <a:ext cx="11002975" cy="685800"/>
-          </a:xfrm>
-          <a:prstGeom prst="rect">
-            <a:avLst/>
-          </a:prstGeom>
-          <a:noFill/>
-        </p:spPr>
-        <p:txBody>
-          <a:bodyPr wrap="square">
-            <a:spAutoFit/>
-          </a:bodyPr>
-          <a:lstStyle/>
-          <a:p>
-            <a:pPr algn="ctr"/>
-            <a:r>
-              <a:rPr sz="4400" b="1" i="0">
+            <a:off x="640080" y="1650492"/>
+            <a:ext cx="10911535" cy="731520"/>
+          </a:xfrm>
+          <a:prstGeom prst="rect">
+            <a:avLst/>
+          </a:prstGeom>
+          <a:noFill/>
+        </p:spPr>
+        <p:txBody>
+          <a:bodyPr wrap="square">
+            <a:spAutoFit/>
+          </a:bodyPr>
+          <a:lstStyle/>
+          <a:p>
+            <a:pPr algn="ctr"/>
+            <a:r>
+              <a:rPr sz="4800" b="1" i="0">
                 <a:solidFill>
                   <a:srgbClr val="FFFFFF"/>
                 </a:solidFill>
@@ -7578,8 +6913,8 @@
         </p:nvSpPr>
         <p:spPr>
           <a:xfrm>
-            <a:off x="594360" y="2560320"/>
-            <a:ext cx="11002975" cy="384048"/>
+            <a:off x="640080" y="2418588"/>
+            <a:ext cx="10911535" cy="365760"/>
           </a:xfrm>
           <a:prstGeom prst="rect">
             <a:avLst/>
@@ -7596,7 +6931,7 @@
             <a:r>
               <a:rPr sz="2400" b="0" i="1">
                 <a:solidFill>
-                  <a:srgbClr val="B4B4B4"/>
+                  <a:srgbClr val="AAAAAA"/>
                 </a:solidFill>
                 <a:latin typeface="Arial"/>
               </a:rPr>
@@ -7613,8 +6948,78 @@
         </p:nvSpPr>
         <p:spPr>
           <a:xfrm>
-            <a:off x="594360" y="2980944"/>
-            <a:ext cx="11002975" cy="347472"/>
+            <a:off x="640080" y="2985516"/>
+            <a:ext cx="10911535" cy="731520"/>
+          </a:xfrm>
+          <a:prstGeom prst="rect">
+            <a:avLst/>
+          </a:prstGeom>
+          <a:noFill/>
+        </p:spPr>
+        <p:txBody>
+          <a:bodyPr wrap="square">
+            <a:spAutoFit/>
+          </a:bodyPr>
+          <a:lstStyle/>
+          <a:p>
+            <a:pPr algn="ctr"/>
+            <a:r>
+              <a:rPr sz="4800" b="1" i="0">
+                <a:solidFill>
+                  <a:srgbClr val="FFFFFF"/>
+                </a:solidFill>
+                <a:latin typeface="Arial"/>
+              </a:rPr>
+              <a:t>まことの   なぐさめ 全ての    すべてよ</a:t>
+            </a:r>
+          </a:p>
+        </p:txBody>
+      </p:sp>
+      <p:sp>
+        <p:nvSpPr>
+          <p:cNvPr id="5" name="TextBox 4"/>
+          <p:cNvSpPr txBox="1"/>
+          <p:nvPr/>
+        </p:nvSpPr>
+        <p:spPr>
+          <a:xfrm>
+            <a:off x="640080" y="3753612"/>
+            <a:ext cx="10911535" cy="365760"/>
+          </a:xfrm>
+          <a:prstGeom prst="rect">
+            <a:avLst/>
+          </a:prstGeom>
+          <a:noFill/>
+        </p:spPr>
+        <p:txBody>
+          <a:bodyPr wrap="square">
+            <a:spAutoFit/>
+          </a:bodyPr>
+          <a:lstStyle/>
+          <a:p>
+            <a:pPr algn="ctr"/>
+            <a:r>
+              <a:rPr sz="2400" b="0" i="1">
+                <a:solidFill>
+                  <a:srgbClr val="AAAAAA"/>
+                </a:solidFill>
+                <a:latin typeface="Arial"/>
+              </a:rPr>
+              <a:t>makotono  nagusame    su beteno sube teyo</a:t>
+            </a:r>
+          </a:p>
+        </p:txBody>
+      </p:sp>
+      <p:sp>
+        <p:nvSpPr>
+          <p:cNvPr id="6" name="TextBox 5"/>
+          <p:cNvSpPr txBox="1"/>
+          <p:nvPr/>
+        </p:nvSpPr>
+        <p:spPr>
+          <a:xfrm>
+            <a:off x="640080" y="4530852"/>
+            <a:ext cx="10911535" cy="310896"/>
           </a:xfrm>
           <a:prstGeom prst="rect">
             <a:avLst/>
@@ -7631,7 +7036,7 @@
             <a:r>
               <a:rPr sz="2000" b="0" i="1">
                 <a:solidFill>
-                  <a:srgbClr val="8C8C8C"/>
+                  <a:srgbClr val="828282"/>
                 </a:solidFill>
                 <a:latin typeface="Arial"/>
               </a:rPr>
@@ -7642,84 +7047,14 @@
       </p:sp>
       <p:sp>
         <p:nvSpPr>
-          <p:cNvPr id="5" name="TextBox 4"/>
-          <p:cNvSpPr txBox="1"/>
-          <p:nvPr/>
-        </p:nvSpPr>
-        <p:spPr>
-          <a:xfrm>
-            <a:off x="594360" y="3529584"/>
-            <a:ext cx="11002975" cy="685800"/>
-          </a:xfrm>
-          <a:prstGeom prst="rect">
-            <a:avLst/>
-          </a:prstGeom>
-          <a:noFill/>
-        </p:spPr>
-        <p:txBody>
-          <a:bodyPr wrap="square">
-            <a:spAutoFit/>
-          </a:bodyPr>
-          <a:lstStyle/>
-          <a:p>
-            <a:pPr algn="ctr"/>
-            <a:r>
-              <a:rPr sz="4400" b="1" i="0">
-                <a:solidFill>
-                  <a:srgbClr val="FFFFFF"/>
-                </a:solidFill>
-                <a:latin typeface="Arial"/>
-              </a:rPr>
-              <a:t>まことの   なぐさめ 全ての    すべてよ</a:t>
-            </a:r>
-          </a:p>
-        </p:txBody>
-      </p:sp>
-      <p:sp>
-        <p:nvSpPr>
-          <p:cNvPr id="6" name="TextBox 5"/>
-          <p:cNvSpPr txBox="1"/>
-          <p:nvPr/>
-        </p:nvSpPr>
-        <p:spPr>
-          <a:xfrm>
-            <a:off x="594360" y="4251960"/>
-            <a:ext cx="11002975" cy="384048"/>
-          </a:xfrm>
-          <a:prstGeom prst="rect">
-            <a:avLst/>
-          </a:prstGeom>
-          <a:noFill/>
-        </p:spPr>
-        <p:txBody>
-          <a:bodyPr wrap="square">
-            <a:spAutoFit/>
-          </a:bodyPr>
-          <a:lstStyle/>
-          <a:p>
-            <a:pPr algn="ctr"/>
-            <a:r>
-              <a:rPr sz="2400" b="0" i="1">
-                <a:solidFill>
-                  <a:srgbClr val="B4B4B4"/>
-                </a:solidFill>
-                <a:latin typeface="Arial"/>
-              </a:rPr>
-              <a:t>makotono  nagusame    su beteno sube teyo</a:t>
-            </a:r>
-          </a:p>
-        </p:txBody>
-      </p:sp>
-      <p:sp>
-        <p:nvSpPr>
           <p:cNvPr id="7" name="TextBox 6"/>
           <p:cNvSpPr txBox="1"/>
           <p:nvPr/>
         </p:nvSpPr>
         <p:spPr>
           <a:xfrm>
-            <a:off x="594360" y="4672584"/>
-            <a:ext cx="11002975" cy="347472"/>
+            <a:off x="640080" y="4896612"/>
+            <a:ext cx="10911535" cy="310896"/>
           </a:xfrm>
           <a:prstGeom prst="rect">
             <a:avLst/>
@@ -7736,7 +7071,7 @@
             <a:r>
               <a:rPr sz="2000" b="0" i="1">
                 <a:solidFill>
-                  <a:srgbClr val="8C8C8C"/>
+                  <a:srgbClr val="828282"/>
                 </a:solidFill>
                 <a:latin typeface="Arial"/>
               </a:rPr>
@@ -7779,23 +7114,23 @@
         </p:nvSpPr>
         <p:spPr>
           <a:xfrm>
-            <a:off x="594360" y="2258568"/>
-            <a:ext cx="11002975" cy="685800"/>
-          </a:xfrm>
-          <a:prstGeom prst="rect">
-            <a:avLst/>
-          </a:prstGeom>
-          <a:noFill/>
-        </p:spPr>
-        <p:txBody>
-          <a:bodyPr wrap="square">
-            <a:spAutoFit/>
-          </a:bodyPr>
-          <a:lstStyle/>
-          <a:p>
-            <a:pPr algn="ctr"/>
-            <a:r>
-              <a:rPr sz="4022" b="1" i="0">
+            <a:off x="640080" y="2052828"/>
+            <a:ext cx="10911535" cy="731520"/>
+          </a:xfrm>
+          <a:prstGeom prst="rect">
+            <a:avLst/>
+          </a:prstGeom>
+          <a:noFill/>
+        </p:spPr>
+        <p:txBody>
+          <a:bodyPr wrap="square">
+            <a:spAutoFit/>
+          </a:bodyPr>
+          <a:lstStyle/>
+          <a:p>
+            <a:pPr algn="ctr"/>
+            <a:r>
+              <a:rPr sz="4300" b="1" i="0">
                 <a:solidFill>
                   <a:srgbClr val="FFFFFF"/>
                 </a:solidFill>
@@ -7814,25 +7149,60 @@
         </p:nvSpPr>
         <p:spPr>
           <a:xfrm>
-            <a:off x="594360" y="2980944"/>
-            <a:ext cx="11002975" cy="347472"/>
-          </a:xfrm>
-          <a:prstGeom prst="rect">
-            <a:avLst/>
-          </a:prstGeom>
-          <a:noFill/>
-        </p:spPr>
-        <p:txBody>
-          <a:bodyPr wrap="square">
-            <a:spAutoFit/>
-          </a:bodyPr>
-          <a:lstStyle/>
-          <a:p>
-            <a:pPr algn="ctr"/>
-            <a:r>
-              <a:rPr sz="2200" b="0" i="1">
-                <a:solidFill>
-                  <a:srgbClr val="8C8C8C"/>
+            <a:off x="640080" y="2985516"/>
+            <a:ext cx="10911535" cy="731520"/>
+          </a:xfrm>
+          <a:prstGeom prst="rect">
+            <a:avLst/>
+          </a:prstGeom>
+          <a:noFill/>
+        </p:spPr>
+        <p:txBody>
+          <a:bodyPr wrap="square">
+            <a:spAutoFit/>
+          </a:bodyPr>
+          <a:lstStyle/>
+          <a:p>
+            <a:pPr algn="ctr"/>
+            <a:r>
+              <a:rPr sz="4000" b="1" i="0">
+                <a:solidFill>
+                  <a:srgbClr val="FFFFFF"/>
+                </a:solidFill>
+                <a:latin typeface="Arial"/>
+              </a:rPr>
+              <a:t>Somente em Cristo, que assumiu a carne</a:t>
+            </a:r>
+          </a:p>
+        </p:txBody>
+      </p:sp>
+      <p:sp>
+        <p:nvSpPr>
+          <p:cNvPr id="4" name="TextBox 3"/>
+          <p:cNvSpPr txBox="1"/>
+          <p:nvPr/>
+        </p:nvSpPr>
+        <p:spPr>
+          <a:xfrm>
+            <a:off x="640080" y="4128516"/>
+            <a:ext cx="10911535" cy="310896"/>
+          </a:xfrm>
+          <a:prstGeom prst="rect">
+            <a:avLst/>
+          </a:prstGeom>
+          <a:noFill/>
+        </p:spPr>
+        <p:txBody>
+          <a:bodyPr wrap="square">
+            <a:spAutoFit/>
+          </a:bodyPr>
+          <a:lstStyle/>
+          <a:p>
+            <a:pPr algn="ctr"/>
+            <a:r>
+              <a:rPr sz="2000" b="0" i="0">
+                <a:solidFill>
+                  <a:srgbClr val="828282"/>
                 </a:solidFill>
                 <a:latin typeface="Arial"/>
               </a:rPr>
@@ -7843,66 +7213,31 @@
       </p:sp>
       <p:sp>
         <p:nvSpPr>
-          <p:cNvPr id="4" name="TextBox 3"/>
-          <p:cNvSpPr txBox="1"/>
-          <p:nvPr/>
-        </p:nvSpPr>
-        <p:spPr>
-          <a:xfrm>
-            <a:off x="594360" y="3529584"/>
-            <a:ext cx="11002975" cy="685800"/>
-          </a:xfrm>
-          <a:prstGeom prst="rect">
-            <a:avLst/>
-          </a:prstGeom>
-          <a:noFill/>
-        </p:spPr>
-        <p:txBody>
-          <a:bodyPr wrap="square">
-            <a:spAutoFit/>
-          </a:bodyPr>
-          <a:lstStyle/>
-          <a:p>
-            <a:pPr algn="ctr"/>
-            <a:r>
-              <a:rPr sz="3705" b="1" i="0">
-                <a:solidFill>
-                  <a:srgbClr val="FFFFFF"/>
-                </a:solidFill>
-                <a:latin typeface="Arial"/>
-              </a:rPr>
-              <a:t>Somente em Cristo, que assumiu a carne</a:t>
-            </a:r>
-          </a:p>
-        </p:txBody>
-      </p:sp>
-      <p:sp>
-        <p:nvSpPr>
           <p:cNvPr id="5" name="TextBox 4"/>
           <p:cNvSpPr txBox="1"/>
           <p:nvPr/>
         </p:nvSpPr>
         <p:spPr>
           <a:xfrm>
-            <a:off x="594360" y="4251960"/>
-            <a:ext cx="11002975" cy="347472"/>
-          </a:xfrm>
-          <a:prstGeom prst="rect">
-            <a:avLst/>
-          </a:prstGeom>
-          <a:noFill/>
-        </p:spPr>
-        <p:txBody>
-          <a:bodyPr wrap="square">
-            <a:spAutoFit/>
-          </a:bodyPr>
-          <a:lstStyle/>
-          <a:p>
-            <a:pPr algn="ctr"/>
-            <a:r>
-              <a:rPr sz="2200" b="0" i="1">
-                <a:solidFill>
-                  <a:srgbClr val="8C8C8C"/>
+            <a:off x="640080" y="4494276"/>
+            <a:ext cx="10911535" cy="310896"/>
+          </a:xfrm>
+          <a:prstGeom prst="rect">
+            <a:avLst/>
+          </a:prstGeom>
+          <a:noFill/>
+        </p:spPr>
+        <p:txBody>
+          <a:bodyPr wrap="square">
+            <a:spAutoFit/>
+          </a:bodyPr>
+          <a:lstStyle/>
+          <a:p>
+            <a:pPr algn="ctr"/>
+            <a:r>
+              <a:rPr sz="2000" b="0" i="0">
+                <a:solidFill>
+                  <a:srgbClr val="828282"/>
                 </a:solidFill>
                 <a:latin typeface="Arial"/>
               </a:rPr>
@@ -7945,23 +7280,23 @@
         </p:nvSpPr>
         <p:spPr>
           <a:xfrm>
-            <a:off x="594360" y="2258568"/>
-            <a:ext cx="11002975" cy="685800"/>
-          </a:xfrm>
-          <a:prstGeom prst="rect">
-            <a:avLst/>
-          </a:prstGeom>
-          <a:noFill/>
-        </p:spPr>
-        <p:txBody>
-          <a:bodyPr wrap="square">
-            <a:spAutoFit/>
-          </a:bodyPr>
-          <a:lstStyle/>
-          <a:p>
-            <a:pPr algn="ctr"/>
-            <a:r>
-              <a:rPr sz="4141" b="1" i="0">
+            <a:off x="640080" y="2052828"/>
+            <a:ext cx="10911535" cy="731520"/>
+          </a:xfrm>
+          <a:prstGeom prst="rect">
+            <a:avLst/>
+          </a:prstGeom>
+          <a:noFill/>
+        </p:spPr>
+        <p:txBody>
+          <a:bodyPr wrap="square">
+            <a:spAutoFit/>
+          </a:bodyPr>
+          <a:lstStyle/>
+          <a:p>
+            <a:pPr algn="ctr"/>
+            <a:r>
+              <a:rPr sz="4500" b="1" i="0">
                 <a:solidFill>
                   <a:srgbClr val="FFFFFF"/>
                 </a:solidFill>
@@ -7980,25 +7315,60 @@
         </p:nvSpPr>
         <p:spPr>
           <a:xfrm>
-            <a:off x="594360" y="2980944"/>
-            <a:ext cx="11002975" cy="347472"/>
-          </a:xfrm>
-          <a:prstGeom prst="rect">
-            <a:avLst/>
-          </a:prstGeom>
-          <a:noFill/>
-        </p:spPr>
-        <p:txBody>
-          <a:bodyPr wrap="square">
-            <a:spAutoFit/>
-          </a:bodyPr>
-          <a:lstStyle/>
-          <a:p>
-            <a:pPr algn="ctr"/>
-            <a:r>
-              <a:rPr sz="2200" b="0" i="1">
-                <a:solidFill>
-                  <a:srgbClr val="8C8C8C"/>
+            <a:off x="640080" y="2985516"/>
+            <a:ext cx="10911535" cy="731520"/>
+          </a:xfrm>
+          <a:prstGeom prst="rect">
+            <a:avLst/>
+          </a:prstGeom>
+          <a:noFill/>
+        </p:spPr>
+        <p:txBody>
+          <a:bodyPr wrap="square">
+            <a:spAutoFit/>
+          </a:bodyPr>
+          <a:lstStyle/>
+          <a:p>
+            <a:pPr algn="ctr"/>
+            <a:r>
+              <a:rPr sz="4800" b="1" i="0">
+                <a:solidFill>
+                  <a:srgbClr val="FFFFFF"/>
+                </a:solidFill>
+                <a:latin typeface="Arial"/>
+              </a:rPr>
+              <a:t>Este dom de amor e de justiça</a:t>
+            </a:r>
+          </a:p>
+        </p:txBody>
+      </p:sp>
+      <p:sp>
+        <p:nvSpPr>
+          <p:cNvPr id="4" name="TextBox 3"/>
+          <p:cNvSpPr txBox="1"/>
+          <p:nvPr/>
+        </p:nvSpPr>
+        <p:spPr>
+          <a:xfrm>
+            <a:off x="640080" y="4128516"/>
+            <a:ext cx="10911535" cy="310896"/>
+          </a:xfrm>
+          <a:prstGeom prst="rect">
+            <a:avLst/>
+          </a:prstGeom>
+          <a:noFill/>
+        </p:spPr>
+        <p:txBody>
+          <a:bodyPr wrap="square">
+            <a:spAutoFit/>
+          </a:bodyPr>
+          <a:lstStyle/>
+          <a:p>
+            <a:pPr algn="ctr"/>
+            <a:r>
+              <a:rPr sz="2000" b="0" i="0">
+                <a:solidFill>
+                  <a:srgbClr val="828282"/>
                 </a:solidFill>
                 <a:latin typeface="Arial"/>
               </a:rPr>
@@ -8009,66 +7379,31 @@
       </p:sp>
       <p:sp>
         <p:nvSpPr>
-          <p:cNvPr id="4" name="TextBox 3"/>
-          <p:cNvSpPr txBox="1"/>
-          <p:nvPr/>
-        </p:nvSpPr>
-        <p:spPr>
-          <a:xfrm>
-            <a:off x="594360" y="3529584"/>
-            <a:ext cx="11002975" cy="685800"/>
-          </a:xfrm>
-          <a:prstGeom prst="rect">
-            <a:avLst/>
-          </a:prstGeom>
-          <a:noFill/>
-        </p:spPr>
-        <p:txBody>
-          <a:bodyPr wrap="square">
-            <a:spAutoFit/>
-          </a:bodyPr>
-          <a:lstStyle/>
-          <a:p>
-            <a:pPr algn="ctr"/>
-            <a:r>
-              <a:rPr sz="4400" b="1" i="0">
-                <a:solidFill>
-                  <a:srgbClr val="FFFFFF"/>
-                </a:solidFill>
-                <a:latin typeface="Arial"/>
-              </a:rPr>
-              <a:t>Este dom de amor e de justiça</a:t>
-            </a:r>
-          </a:p>
-        </p:txBody>
-      </p:sp>
-      <p:sp>
-        <p:nvSpPr>
           <p:cNvPr id="5" name="TextBox 4"/>
           <p:cNvSpPr txBox="1"/>
           <p:nvPr/>
         </p:nvSpPr>
         <p:spPr>
           <a:xfrm>
-            <a:off x="594360" y="4251960"/>
-            <a:ext cx="11002975" cy="347472"/>
-          </a:xfrm>
-          <a:prstGeom prst="rect">
-            <a:avLst/>
-          </a:prstGeom>
-          <a:noFill/>
-        </p:spPr>
-        <p:txBody>
-          <a:bodyPr wrap="square">
-            <a:spAutoFit/>
-          </a:bodyPr>
-          <a:lstStyle/>
-          <a:p>
-            <a:pPr algn="ctr"/>
-            <a:r>
-              <a:rPr sz="2200" b="0" i="1">
-                <a:solidFill>
-                  <a:srgbClr val="8C8C8C"/>
+            <a:off x="640080" y="4494276"/>
+            <a:ext cx="10911535" cy="310896"/>
+          </a:xfrm>
+          <a:prstGeom prst="rect">
+            <a:avLst/>
+          </a:prstGeom>
+          <a:noFill/>
+        </p:spPr>
+        <p:txBody>
+          <a:bodyPr wrap="square">
+            <a:spAutoFit/>
+          </a:bodyPr>
+          <a:lstStyle/>
+          <a:p>
+            <a:pPr algn="ctr"/>
+            <a:r>
+              <a:rPr sz="2000" b="0" i="0">
+                <a:solidFill>
+                  <a:srgbClr val="828282"/>
                 </a:solidFill>
                 <a:latin typeface="Arial"/>
               </a:rPr>
@@ -8111,23 +7446,23 @@
         </p:nvSpPr>
         <p:spPr>
           <a:xfrm>
-            <a:off x="594360" y="2258568"/>
-            <a:ext cx="11002975" cy="685800"/>
-          </a:xfrm>
-          <a:prstGeom prst="rect">
-            <a:avLst/>
-          </a:prstGeom>
-          <a:noFill/>
-        </p:spPr>
-        <p:txBody>
-          <a:bodyPr wrap="square">
-            <a:spAutoFit/>
-          </a:bodyPr>
-          <a:lstStyle/>
-          <a:p>
-            <a:pPr algn="ctr"/>
-            <a:r>
-              <a:rPr sz="3705" b="1" i="0">
+            <a:off x="640080" y="2052828"/>
+            <a:ext cx="10911535" cy="731520"/>
+          </a:xfrm>
+          <a:prstGeom prst="rect">
+            <a:avLst/>
+          </a:prstGeom>
+          <a:noFill/>
+        </p:spPr>
+        <p:txBody>
+          <a:bodyPr wrap="square">
+            <a:spAutoFit/>
+          </a:bodyPr>
+          <a:lstStyle/>
+          <a:p>
+            <a:pPr algn="ctr"/>
+            <a:r>
+              <a:rPr sz="4000" b="1" i="0">
                 <a:solidFill>
                   <a:srgbClr val="FFFFFF"/>
                 </a:solidFill>
@@ -8146,99 +7481,29 @@
         </p:nvSpPr>
         <p:spPr>
           <a:xfrm>
-            <a:off x="594360" y="2980944"/>
-            <a:ext cx="11002975" cy="347472"/>
-          </a:xfrm>
-          <a:prstGeom prst="rect">
-            <a:avLst/>
-          </a:prstGeom>
-          <a:noFill/>
-        </p:spPr>
-        <p:txBody>
-          <a:bodyPr wrap="square">
-            <a:spAutoFit/>
-          </a:bodyPr>
-          <a:lstStyle/>
-          <a:p>
-            <a:pPr algn="ctr"/>
-            <a:r>
-              <a:rPr sz="2200" b="0" i="1">
-                <a:solidFill>
-                  <a:srgbClr val="8C8C8C"/>
-                </a:solidFill>
-                <a:latin typeface="Arial"/>
-              </a:rPr>
-              <a:t/>
-            </a:r>
-          </a:p>
-        </p:txBody>
-      </p:sp>
-      <p:sp>
-        <p:nvSpPr>
-          <p:cNvPr id="4" name="TextBox 3"/>
-          <p:cNvSpPr txBox="1"/>
-          <p:nvPr/>
-        </p:nvSpPr>
-        <p:spPr>
-          <a:xfrm>
-            <a:off x="594360" y="3529584"/>
-            <a:ext cx="11002975" cy="685800"/>
-          </a:xfrm>
-          <a:prstGeom prst="rect">
-            <a:avLst/>
-          </a:prstGeom>
-          <a:noFill/>
-        </p:spPr>
-        <p:txBody>
-          <a:bodyPr wrap="square">
-            <a:spAutoFit/>
-          </a:bodyPr>
-          <a:lstStyle/>
-          <a:p>
-            <a:pPr algn="ctr"/>
-            <a:r>
-              <a:rPr sz="4400" b="1" i="0">
+            <a:off x="640080" y="2985516"/>
+            <a:ext cx="10911535" cy="731520"/>
+          </a:xfrm>
+          <a:prstGeom prst="rect">
+            <a:avLst/>
+          </a:prstGeom>
+          <a:noFill/>
+        </p:spPr>
+        <p:txBody>
+          <a:bodyPr wrap="square">
+            <a:spAutoFit/>
+          </a:bodyPr>
+          <a:lstStyle/>
+          <a:p>
+            <a:pPr algn="ctr"/>
+            <a:r>
+              <a:rPr sz="4800" b="1" i="0">
                 <a:solidFill>
                   <a:srgbClr val="FFFFFF"/>
                 </a:solidFill>
                 <a:latin typeface="Arial"/>
               </a:rPr>
               <a:t>Até na cruz, como Jesus morreu</a:t>
-            </a:r>
-          </a:p>
-        </p:txBody>
-      </p:sp>
-      <p:sp>
-        <p:nvSpPr>
-          <p:cNvPr id="5" name="TextBox 4"/>
-          <p:cNvSpPr txBox="1"/>
-          <p:nvPr/>
-        </p:nvSpPr>
-        <p:spPr>
-          <a:xfrm>
-            <a:off x="594360" y="4251960"/>
-            <a:ext cx="11002975" cy="347472"/>
-          </a:xfrm>
-          <a:prstGeom prst="rect">
-            <a:avLst/>
-          </a:prstGeom>
-          <a:noFill/>
-        </p:spPr>
-        <p:txBody>
-          <a:bodyPr wrap="square">
-            <a:spAutoFit/>
-          </a:bodyPr>
-          <a:lstStyle/>
-          <a:p>
-            <a:pPr algn="ctr"/>
-            <a:r>
-              <a:rPr sz="2200" b="0" i="1">
-                <a:solidFill>
-                  <a:srgbClr val="8C8C8C"/>
-                </a:solidFill>
-                <a:latin typeface="Arial"/>
-              </a:rPr>
-              <a:t/>
             </a:r>
           </a:p>
         </p:txBody>

--- a/output_pptx/In_Christ_Alone.pptx
+++ b/output_pptx/In_Christ_Alone.pptx
@@ -3358,6 +3358,76 @@
           </a:p>
         </p:txBody>
       </p:sp>
+      <p:sp>
+        <p:nvSpPr>
+          <p:cNvPr id="4" name="TextBox 3"/>
+          <p:cNvSpPr txBox="1"/>
+          <p:nvPr/>
+        </p:nvSpPr>
+        <p:spPr>
+          <a:xfrm>
+            <a:off x="640080" y="4128516"/>
+            <a:ext cx="10911535" cy="310896"/>
+          </a:xfrm>
+          <a:prstGeom prst="rect">
+            <a:avLst/>
+          </a:prstGeom>
+          <a:noFill/>
+        </p:spPr>
+        <p:txBody>
+          <a:bodyPr wrap="square">
+            <a:spAutoFit/>
+          </a:bodyPr>
+          <a:lstStyle/>
+          <a:p>
+            <a:pPr algn="ctr"/>
+            <a:r>
+              <a:rPr sz="2000" b="0" i="0">
+                <a:solidFill>
+                  <a:srgbClr val="828282"/>
+                </a:solidFill>
+                <a:latin typeface="Arial"/>
+              </a:rPr>
+              <a:t>神の怒りは満たされた</a:t>
+            </a:r>
+          </a:p>
+        </p:txBody>
+      </p:sp>
+      <p:sp>
+        <p:nvSpPr>
+          <p:cNvPr id="5" name="TextBox 4"/>
+          <p:cNvSpPr txBox="1"/>
+          <p:nvPr/>
+        </p:nvSpPr>
+        <p:spPr>
+          <a:xfrm>
+            <a:off x="640080" y="4494276"/>
+            <a:ext cx="10911535" cy="310896"/>
+          </a:xfrm>
+          <a:prstGeom prst="rect">
+            <a:avLst/>
+          </a:prstGeom>
+          <a:noFill/>
+        </p:spPr>
+        <p:txBody>
+          <a:bodyPr wrap="square">
+            <a:spAutoFit/>
+          </a:bodyPr>
+          <a:lstStyle/>
+          <a:p>
+            <a:pPr algn="ctr"/>
+            <a:r>
+              <a:rPr sz="2000" b="0" i="0">
+                <a:solidFill>
+                  <a:srgbClr val="828282"/>
+                </a:solidFill>
+                <a:latin typeface="Arial"/>
+              </a:rPr>
+              <a:t>すべての罪がイエスの上に置かれた</a:t>
+            </a:r>
+          </a:p>
+        </p:txBody>
+      </p:sp>
     </p:spTree>
   </p:cSld>
   <p:clrMapOvr>
@@ -4258,6 +4328,76 @@
           </a:p>
         </p:txBody>
       </p:sp>
+      <p:sp>
+        <p:nvSpPr>
+          <p:cNvPr id="4" name="TextBox 3"/>
+          <p:cNvSpPr txBox="1"/>
+          <p:nvPr/>
+        </p:nvSpPr>
+        <p:spPr>
+          <a:xfrm>
+            <a:off x="640080" y="4128516"/>
+            <a:ext cx="10911535" cy="310896"/>
+          </a:xfrm>
+          <a:prstGeom prst="rect">
+            <a:avLst/>
+          </a:prstGeom>
+          <a:noFill/>
+        </p:spPr>
+        <p:txBody>
+          <a:bodyPr wrap="square">
+            <a:spAutoFit/>
+          </a:bodyPr>
+          <a:lstStyle/>
+          <a:p>
+            <a:pPr algn="ctr"/>
+            <a:r>
+              <a:rPr sz="2000" b="0" i="0">
+                <a:solidFill>
+                  <a:srgbClr val="828282"/>
+                </a:solidFill>
+                <a:latin typeface="Arial"/>
+              </a:rPr>
+              <a:t>そしてイエスが勝利の中にあるように</a:t>
+            </a:r>
+          </a:p>
+        </p:txBody>
+      </p:sp>
+      <p:sp>
+        <p:nvSpPr>
+          <p:cNvPr id="5" name="TextBox 4"/>
+          <p:cNvSpPr txBox="1"/>
+          <p:nvPr/>
+        </p:nvSpPr>
+        <p:spPr>
+          <a:xfrm>
+            <a:off x="640080" y="4494276"/>
+            <a:ext cx="10911535" cy="310896"/>
+          </a:xfrm>
+          <a:prstGeom prst="rect">
+            <a:avLst/>
+          </a:prstGeom>
+          <a:noFill/>
+        </p:spPr>
+        <p:txBody>
+          <a:bodyPr wrap="square">
+            <a:spAutoFit/>
+          </a:bodyPr>
+          <a:lstStyle/>
+          <a:p>
+            <a:pPr algn="ctr"/>
+            <a:r>
+              <a:rPr sz="2000" b="0" i="0">
+                <a:solidFill>
+                  <a:srgbClr val="828282"/>
+                </a:solidFill>
+                <a:latin typeface="Arial"/>
+              </a:rPr>
+              <a:t>罪の呪いは力を失った</a:t>
+            </a:r>
+          </a:p>
+        </p:txBody>
+      </p:sp>
     </p:spTree>
   </p:cSld>
   <p:clrMapOvr>
@@ -4354,6 +4494,76 @@
           </a:p>
         </p:txBody>
       </p:sp>
+      <p:sp>
+        <p:nvSpPr>
+          <p:cNvPr id="4" name="TextBox 3"/>
+          <p:cNvSpPr txBox="1"/>
+          <p:nvPr/>
+        </p:nvSpPr>
+        <p:spPr>
+          <a:xfrm>
+            <a:off x="640080" y="4128516"/>
+            <a:ext cx="10911535" cy="310896"/>
+          </a:xfrm>
+          <a:prstGeom prst="rect">
+            <a:avLst/>
+          </a:prstGeom>
+          <a:noFill/>
+        </p:spPr>
+        <p:txBody>
+          <a:bodyPr wrap="square">
+            <a:spAutoFit/>
+          </a:bodyPr>
+          <a:lstStyle/>
+          <a:p>
+            <a:pPr algn="ctr"/>
+            <a:r>
+              <a:rPr sz="2000" b="0" i="0">
+                <a:solidFill>
+                  <a:srgbClr val="828282"/>
+                </a:solidFill>
+                <a:latin typeface="Arial"/>
+              </a:rPr>
+              <a:t>わたしは主のもの、主はわたしのもの</a:t>
+            </a:r>
+          </a:p>
+        </p:txBody>
+      </p:sp>
+      <p:sp>
+        <p:nvSpPr>
+          <p:cNvPr id="5" name="TextBox 4"/>
+          <p:cNvSpPr txBox="1"/>
+          <p:nvPr/>
+        </p:nvSpPr>
+        <p:spPr>
+          <a:xfrm>
+            <a:off x="640080" y="4494276"/>
+            <a:ext cx="10911535" cy="310896"/>
+          </a:xfrm>
+          <a:prstGeom prst="rect">
+            <a:avLst/>
+          </a:prstGeom>
+          <a:noFill/>
+        </p:spPr>
+        <p:txBody>
+          <a:bodyPr wrap="square">
+            <a:spAutoFit/>
+          </a:bodyPr>
+          <a:lstStyle/>
+          <a:p>
+            <a:pPr algn="ctr"/>
+            <a:r>
+              <a:rPr sz="2000" b="0" i="0">
+                <a:solidFill>
+                  <a:srgbClr val="828282"/>
+                </a:solidFill>
+                <a:latin typeface="Arial"/>
+              </a:rPr>
+              <a:t>キリストの尊い血で買われた</a:t>
+            </a:r>
+          </a:p>
+        </p:txBody>
+      </p:sp>
     </p:spTree>
   </p:cSld>
   <p:clrMapOvr>
@@ -5420,6 +5630,76 @@
           </a:p>
         </p:txBody>
       </p:sp>
+      <p:sp>
+        <p:nvSpPr>
+          <p:cNvPr id="4" name="TextBox 3"/>
+          <p:cNvSpPr txBox="1"/>
+          <p:nvPr/>
+        </p:nvSpPr>
+        <p:spPr>
+          <a:xfrm>
+            <a:off x="640080" y="4128516"/>
+            <a:ext cx="10911535" cy="310896"/>
+          </a:xfrm>
+          <a:prstGeom prst="rect">
+            <a:avLst/>
+          </a:prstGeom>
+          <a:noFill/>
+        </p:spPr>
+        <p:txBody>
+          <a:bodyPr wrap="square">
+            <a:spAutoFit/>
+          </a:bodyPr>
+          <a:lstStyle/>
+          <a:p>
+            <a:pPr algn="ctr"/>
+            <a:r>
+              <a:rPr sz="2000" b="0" i="0">
+                <a:solidFill>
+                  <a:srgbClr val="828282"/>
+                </a:solidFill>
+                <a:latin typeface="Arial"/>
+              </a:rPr>
+              <a:t>決してその手からわたしを奪うことはできない</a:t>
+            </a:r>
+          </a:p>
+        </p:txBody>
+      </p:sp>
+      <p:sp>
+        <p:nvSpPr>
+          <p:cNvPr id="5" name="TextBox 4"/>
+          <p:cNvSpPr txBox="1"/>
+          <p:nvPr/>
+        </p:nvSpPr>
+        <p:spPr>
+          <a:xfrm>
+            <a:off x="640080" y="4494276"/>
+            <a:ext cx="10911535" cy="310896"/>
+          </a:xfrm>
+          <a:prstGeom prst="rect">
+            <a:avLst/>
+          </a:prstGeom>
+          <a:noFill/>
+        </p:spPr>
+        <p:txBody>
+          <a:bodyPr wrap="square">
+            <a:spAutoFit/>
+          </a:bodyPr>
+          <a:lstStyle/>
+          <a:p>
+            <a:pPr algn="ctr"/>
+            <a:r>
+              <a:rPr sz="2000" b="0" i="0">
+                <a:solidFill>
+                  <a:srgbClr val="828282"/>
+                </a:solidFill>
+                <a:latin typeface="Arial"/>
+              </a:rPr>
+              <a:t>主が帰ってくるか、わたしを家に召すまで</a:t>
+            </a:r>
+          </a:p>
+        </p:txBody>
+      </p:sp>
     </p:spTree>
   </p:cSld>
   <p:clrMapOvr>
@@ -5516,6 +5796,76 @@
           </a:p>
         </p:txBody>
       </p:sp>
+      <p:sp>
+        <p:nvSpPr>
+          <p:cNvPr id="4" name="TextBox 3"/>
+          <p:cNvSpPr txBox="1"/>
+          <p:nvPr/>
+        </p:nvSpPr>
+        <p:spPr>
+          <a:xfrm>
+            <a:off x="640080" y="4128516"/>
+            <a:ext cx="10911535" cy="310896"/>
+          </a:xfrm>
+          <a:prstGeom prst="rect">
+            <a:avLst/>
+          </a:prstGeom>
+          <a:noFill/>
+        </p:spPr>
+        <p:txBody>
+          <a:bodyPr wrap="square">
+            <a:spAutoFit/>
+          </a:bodyPr>
+          <a:lstStyle/>
+          <a:p>
+            <a:pPr algn="ctr"/>
+            <a:r>
+              <a:rPr sz="2000" b="0" i="0">
+                <a:solidFill>
+                  <a:srgbClr val="828282"/>
+                </a:solidFill>
+                <a:latin typeface="Arial"/>
+              </a:rPr>
+              <a:t>ここでキリストの力に留まる</a:t>
+            </a:r>
+          </a:p>
+        </p:txBody>
+      </p:sp>
+      <p:sp>
+        <p:nvSpPr>
+          <p:cNvPr id="5" name="TextBox 4"/>
+          <p:cNvSpPr txBox="1"/>
+          <p:nvPr/>
+        </p:nvSpPr>
+        <p:spPr>
+          <a:xfrm>
+            <a:off x="640080" y="4494276"/>
+            <a:ext cx="10911535" cy="310896"/>
+          </a:xfrm>
+          <a:prstGeom prst="rect">
+            <a:avLst/>
+          </a:prstGeom>
+          <a:noFill/>
+        </p:spPr>
+        <p:txBody>
+          <a:bodyPr wrap="square">
+            <a:spAutoFit/>
+          </a:bodyPr>
+          <a:lstStyle/>
+          <a:p>
+            <a:pPr algn="ctr"/>
+            <a:r>
+              <a:rPr sz="2000" b="0" i="0">
+                <a:solidFill>
+                  <a:srgbClr val="828282"/>
+                </a:solidFill>
+                <a:latin typeface="Arial"/>
+              </a:rPr>
+              <a:t>これはわたしの内のキリストの力</a:t>
+            </a:r>
+          </a:p>
+        </p:txBody>
+      </p:sp>
     </p:spTree>
   </p:cSld>
   <p:clrMapOvr>
@@ -6154,6 +6504,76 @@
           </a:p>
         </p:txBody>
       </p:sp>
+      <p:sp>
+        <p:nvSpPr>
+          <p:cNvPr id="6" name="TextBox 5"/>
+          <p:cNvSpPr txBox="1"/>
+          <p:nvPr/>
+        </p:nvSpPr>
+        <p:spPr>
+          <a:xfrm>
+            <a:off x="640080" y="4530852"/>
+            <a:ext cx="10911535" cy="310896"/>
+          </a:xfrm>
+          <a:prstGeom prst="rect">
+            <a:avLst/>
+          </a:prstGeom>
+          <a:noFill/>
+        </p:spPr>
+        <p:txBody>
+          <a:bodyPr wrap="square">
+            <a:spAutoFit/>
+          </a:bodyPr>
+          <a:lstStyle/>
+          <a:p>
+            <a:pPr algn="ctr"/>
+            <a:r>
+              <a:rPr sz="2000" b="0" i="1">
+                <a:solidFill>
+                  <a:srgbClr val="828282"/>
+                </a:solidFill>
+                <a:latin typeface="Arial"/>
+              </a:rPr>
+              <a:t>Força, esperança e ajuda em Jesus, o Senhor</a:t>
+            </a:r>
+          </a:p>
+        </p:txBody>
+      </p:sp>
+      <p:sp>
+        <p:nvSpPr>
+          <p:cNvPr id="7" name="TextBox 6"/>
+          <p:cNvSpPr txBox="1"/>
+          <p:nvPr/>
+        </p:nvSpPr>
+        <p:spPr>
+          <a:xfrm>
+            <a:off x="640080" y="4896612"/>
+            <a:ext cx="10911535" cy="310896"/>
+          </a:xfrm>
+          <a:prstGeom prst="rect">
+            <a:avLst/>
+          </a:prstGeom>
+          <a:noFill/>
+        </p:spPr>
+        <p:txBody>
+          <a:bodyPr wrap="square">
+            <a:spAutoFit/>
+          </a:bodyPr>
+          <a:lstStyle/>
+          <a:p>
+            <a:pPr algn="ctr"/>
+            <a:r>
+              <a:rPr sz="2000" b="0" i="1">
+                <a:solidFill>
+                  <a:srgbClr val="828282"/>
+                </a:solidFill>
+                <a:latin typeface="Arial"/>
+              </a:rPr>
+              <a:t>Na escuridão da noite, paz certa em Jesus, o Senhor</a:t>
+            </a:r>
+          </a:p>
+        </p:txBody>
+      </p:sp>
     </p:spTree>
   </p:cSld>
   <p:clrMapOvr>
@@ -6320,6 +6740,76 @@
           </a:p>
         </p:txBody>
       </p:sp>
+      <p:sp>
+        <p:nvSpPr>
+          <p:cNvPr id="6" name="TextBox 5"/>
+          <p:cNvSpPr txBox="1"/>
+          <p:nvPr/>
+        </p:nvSpPr>
+        <p:spPr>
+          <a:xfrm>
+            <a:off x="640080" y="4530852"/>
+            <a:ext cx="10911535" cy="310896"/>
+          </a:xfrm>
+          <a:prstGeom prst="rect">
+            <a:avLst/>
+          </a:prstGeom>
+          <a:noFill/>
+        </p:spPr>
+        <p:txBody>
+          <a:bodyPr wrap="square">
+            <a:spAutoFit/>
+          </a:bodyPr>
+          <a:lstStyle/>
+          <a:p>
+            <a:pPr algn="ctr"/>
+            <a:r>
+              <a:rPr sz="2000" b="0" i="1">
+                <a:solidFill>
+                  <a:srgbClr val="828282"/>
+                </a:solidFill>
+                <a:latin typeface="Arial"/>
+              </a:rPr>
+              <a:t>Entregar a vida, o louvor, tudo</a:t>
+            </a:r>
+          </a:p>
+        </p:txBody>
+      </p:sp>
+      <p:sp>
+        <p:nvSpPr>
+          <p:cNvPr id="7" name="TextBox 6"/>
+          <p:cNvSpPr txBox="1"/>
+          <p:nvPr/>
+        </p:nvSpPr>
+        <p:spPr>
+          <a:xfrm>
+            <a:off x="640080" y="4896612"/>
+            <a:ext cx="10911535" cy="310896"/>
+          </a:xfrm>
+          <a:prstGeom prst="rect">
+            <a:avLst/>
+          </a:prstGeom>
+          <a:noFill/>
+        </p:spPr>
+        <p:txBody>
+          <a:bodyPr wrap="square">
+            <a:spAutoFit/>
+          </a:bodyPr>
+          <a:lstStyle/>
+          <a:p>
+            <a:pPr algn="ctr"/>
+            <a:r>
+              <a:rPr sz="2000" b="0" i="1">
+                <a:solidFill>
+                  <a:srgbClr val="828282"/>
+                </a:solidFill>
+                <a:latin typeface="Arial"/>
+              </a:rPr>
+              <a:t>Rei dos reis, todo o universo o louva</a:t>
+            </a:r>
+          </a:p>
+        </p:txBody>
+      </p:sp>
     </p:spTree>
   </p:cSld>
   <p:clrMapOvr>
@@ -6416,6 +6906,41 @@
           </a:p>
         </p:txBody>
       </p:sp>
+      <p:sp>
+        <p:nvSpPr>
+          <p:cNvPr id="4" name="TextBox 3"/>
+          <p:cNvSpPr txBox="1"/>
+          <p:nvPr/>
+        </p:nvSpPr>
+        <p:spPr>
+          <a:xfrm>
+            <a:off x="640080" y="4046220"/>
+            <a:ext cx="10911535" cy="310896"/>
+          </a:xfrm>
+          <a:prstGeom prst="rect">
+            <a:avLst/>
+          </a:prstGeom>
+          <a:noFill/>
+        </p:spPr>
+        <p:txBody>
+          <a:bodyPr wrap="square">
+            <a:spAutoFit/>
+          </a:bodyPr>
+          <a:lstStyle/>
+          <a:p>
+            <a:pPr algn="ctr"/>
+            <a:r>
+              <a:rPr sz="2000" b="0" i="1">
+                <a:solidFill>
+                  <a:srgbClr val="828282"/>
+                </a:solidFill>
+                <a:latin typeface="Arial"/>
+              </a:rPr>
+              <a:t>Louvar, louvar</a:t>
+            </a:r>
+          </a:p>
+        </p:txBody>
+      </p:sp>
     </p:spTree>
   </p:cSld>
   <p:clrMapOvr>
@@ -6512,6 +7037,76 @@
           </a:p>
         </p:txBody>
       </p:sp>
+      <p:sp>
+        <p:nvSpPr>
+          <p:cNvPr id="4" name="TextBox 3"/>
+          <p:cNvSpPr txBox="1"/>
+          <p:nvPr/>
+        </p:nvSpPr>
+        <p:spPr>
+          <a:xfrm>
+            <a:off x="640080" y="4128516"/>
+            <a:ext cx="10911535" cy="310896"/>
+          </a:xfrm>
+          <a:prstGeom prst="rect">
+            <a:avLst/>
+          </a:prstGeom>
+          <a:noFill/>
+        </p:spPr>
+        <p:txBody>
+          <a:bodyPr wrap="square">
+            <a:spAutoFit/>
+          </a:bodyPr>
+          <a:lstStyle/>
+          <a:p>
+            <a:pPr algn="ctr"/>
+            <a:r>
+              <a:rPr sz="2000" b="0" i="0">
+                <a:solidFill>
+                  <a:srgbClr val="828282"/>
+                </a:solidFill>
+                <a:latin typeface="Arial"/>
+              </a:rPr>
+              <a:t>どんな激しい干ばつや嵐の中でも堅く立つ</a:t>
+            </a:r>
+          </a:p>
+        </p:txBody>
+      </p:sp>
+      <p:sp>
+        <p:nvSpPr>
+          <p:cNvPr id="5" name="TextBox 4"/>
+          <p:cNvSpPr txBox="1"/>
+          <p:nvPr/>
+        </p:nvSpPr>
+        <p:spPr>
+          <a:xfrm>
+            <a:off x="640080" y="4494276"/>
+            <a:ext cx="10911535" cy="310896"/>
+          </a:xfrm>
+          <a:prstGeom prst="rect">
+            <a:avLst/>
+          </a:prstGeom>
+          <a:noFill/>
+        </p:spPr>
+        <p:txBody>
+          <a:bodyPr wrap="square">
+            <a:spAutoFit/>
+          </a:bodyPr>
+          <a:lstStyle/>
+          <a:p>
+            <a:pPr algn="ctr"/>
+            <a:r>
+              <a:rPr sz="2000" b="0" i="0">
+                <a:solidFill>
+                  <a:srgbClr val="828282"/>
+                </a:solidFill>
+                <a:latin typeface="Arial"/>
+              </a:rPr>
+              <a:t>愛の高さ、平安の深さよ</a:t>
+            </a:r>
+          </a:p>
+        </p:txBody>
+      </p:sp>
     </p:spTree>
   </p:cSld>
   <p:clrMapOvr>
@@ -6608,6 +7203,76 @@
           </a:p>
         </p:txBody>
       </p:sp>
+      <p:sp>
+        <p:nvSpPr>
+          <p:cNvPr id="4" name="TextBox 3"/>
+          <p:cNvSpPr txBox="1"/>
+          <p:nvPr/>
+        </p:nvSpPr>
+        <p:spPr>
+          <a:xfrm>
+            <a:off x="640080" y="4128516"/>
+            <a:ext cx="10911535" cy="310896"/>
+          </a:xfrm>
+          <a:prstGeom prst="rect">
+            <a:avLst/>
+          </a:prstGeom>
+          <a:noFill/>
+        </p:spPr>
+        <p:txBody>
+          <a:bodyPr wrap="square">
+            <a:spAutoFit/>
+          </a:bodyPr>
+          <a:lstStyle/>
+          <a:p>
+            <a:pPr algn="ctr"/>
+            <a:r>
+              <a:rPr sz="2000" b="0" i="0">
+                <a:solidFill>
+                  <a:srgbClr val="828282"/>
+                </a:solidFill>
+                <a:latin typeface="Arial"/>
+              </a:rPr>
+              <a:t>恐れが静まり、努力が終わるとき</a:t>
+            </a:r>
+          </a:p>
+        </p:txBody>
+      </p:sp>
+      <p:sp>
+        <p:nvSpPr>
+          <p:cNvPr id="5" name="TextBox 4"/>
+          <p:cNvSpPr txBox="1"/>
+          <p:nvPr/>
+        </p:nvSpPr>
+        <p:spPr>
+          <a:xfrm>
+            <a:off x="640080" y="4494276"/>
+            <a:ext cx="10911535" cy="310896"/>
+          </a:xfrm>
+          <a:prstGeom prst="rect">
+            <a:avLst/>
+          </a:prstGeom>
+          <a:noFill/>
+        </p:spPr>
+        <p:txBody>
+          <a:bodyPr wrap="square">
+            <a:spAutoFit/>
+          </a:bodyPr>
+          <a:lstStyle/>
+          <a:p>
+            <a:pPr algn="ctr"/>
+            <a:r>
+              <a:rPr sz="2000" b="0" i="0">
+                <a:solidFill>
+                  <a:srgbClr val="828282"/>
+                </a:solidFill>
+                <a:latin typeface="Arial"/>
+              </a:rPr>
+              <a:t>わが慰め主よ、すべてにおいてわが全て</a:t>
+            </a:r>
+          </a:p>
+        </p:txBody>
+      </p:sp>
     </p:spTree>
   </p:cSld>
   <p:clrMapOvr>
@@ -7504,6 +8169,76 @@
                 <a:latin typeface="Arial"/>
               </a:rPr>
               <a:t>Até na cruz, como Jesus morreu</a:t>
+            </a:r>
+          </a:p>
+        </p:txBody>
+      </p:sp>
+      <p:sp>
+        <p:nvSpPr>
+          <p:cNvPr id="4" name="TextBox 3"/>
+          <p:cNvSpPr txBox="1"/>
+          <p:nvPr/>
+        </p:nvSpPr>
+        <p:spPr>
+          <a:xfrm>
+            <a:off x="640080" y="4128516"/>
+            <a:ext cx="10911535" cy="310896"/>
+          </a:xfrm>
+          <a:prstGeom prst="rect">
+            <a:avLst/>
+          </a:prstGeom>
+          <a:noFill/>
+        </p:spPr>
+        <p:txBody>
+          <a:bodyPr wrap="square">
+            <a:spAutoFit/>
+          </a:bodyPr>
+          <a:lstStyle/>
+          <a:p>
+            <a:pPr algn="ctr"/>
+            <a:r>
+              <a:rPr sz="2000" b="0" i="0">
+                <a:solidFill>
+                  <a:srgbClr val="828282"/>
+                </a:solidFill>
+                <a:latin typeface="Arial"/>
+              </a:rPr>
+              <a:t>救いに来た者に軽蔑されて</a:t>
+            </a:r>
+          </a:p>
+        </p:txBody>
+      </p:sp>
+      <p:sp>
+        <p:nvSpPr>
+          <p:cNvPr id="5" name="TextBox 4"/>
+          <p:cNvSpPr txBox="1"/>
+          <p:nvPr/>
+        </p:nvSpPr>
+        <p:spPr>
+          <a:xfrm>
+            <a:off x="640080" y="4494276"/>
+            <a:ext cx="10911535" cy="310896"/>
+          </a:xfrm>
+          <a:prstGeom prst="rect">
+            <a:avLst/>
+          </a:prstGeom>
+          <a:noFill/>
+        </p:spPr>
+        <p:txBody>
+          <a:bodyPr wrap="square">
+            <a:spAutoFit/>
+          </a:bodyPr>
+          <a:lstStyle/>
+          <a:p>
+            <a:pPr algn="ctr"/>
+            <a:r>
+              <a:rPr sz="2000" b="0" i="0">
+                <a:solidFill>
+                  <a:srgbClr val="828282"/>
+                </a:solidFill>
+                <a:latin typeface="Arial"/>
+              </a:rPr>
+              <a:t>十字架の上でイエスが死んだように</a:t>
             </a:r>
           </a:p>
         </p:txBody>
